--- a/Soutenance de Licence - GBANDI WAKE (1).pptx
+++ b/Soutenance de Licence - GBANDI WAKE (1).pptx
@@ -27,62 +27,64 @@
     <p:sldId id="279" r:id="rId20"/>
     <p:sldId id="280" r:id="rId21"/>
     <p:sldId id="263" r:id="rId22"/>
-    <p:sldId id="282" r:id="rId23"/>
-    <p:sldId id="265" r:id="rId24"/>
-    <p:sldId id="281" r:id="rId25"/>
-    <p:sldId id="283" r:id="rId26"/>
-    <p:sldId id="284" r:id="rId27"/>
-    <p:sldId id="285" r:id="rId28"/>
-    <p:sldId id="267" r:id="rId29"/>
+    <p:sldId id="286" r:id="rId23"/>
+    <p:sldId id="282" r:id="rId24"/>
+    <p:sldId id="265" r:id="rId25"/>
+    <p:sldId id="281" r:id="rId26"/>
+    <p:sldId id="283" r:id="rId27"/>
+    <p:sldId id="284" r:id="rId28"/>
+    <p:sldId id="285" r:id="rId29"/>
+    <p:sldId id="267" r:id="rId30"/>
   </p:sldIdLst>
   <p:sldSz cx="12192000" cy="6858000"/>
   <p:notesSz cx="6858000" cy="9144000"/>
   <p:embeddedFontLst>
     <p:embeddedFont>
       <p:font typeface="Calibri" panose="020F0502020204030204"/>
-      <p:regular r:id="rId33"/>
-      <p:bold r:id="rId34"/>
-      <p:italic r:id="rId35"/>
-      <p:boldItalic r:id="rId36"/>
+      <p:regular r:id="rId34"/>
+      <p:bold r:id="rId35"/>
+      <p:italic r:id="rId36"/>
+      <p:boldItalic r:id="rId37"/>
     </p:embeddedFont>
     <p:embeddedFont>
       <p:font typeface="Lato" panose="020F0502020204030203"/>
-      <p:regular r:id="rId37"/>
-      <p:bold r:id="rId38"/>
-      <p:italic r:id="rId39"/>
-      <p:boldItalic r:id="rId40"/>
+      <p:regular r:id="rId38"/>
     </p:embeddedFont>
     <p:embeddedFont>
       <p:font typeface="Poppins" panose="00000500000000000000"/>
-      <p:regular r:id="rId41"/>
-      <p:bold r:id="rId42"/>
-      <p:italic r:id="rId43"/>
-      <p:boldItalic r:id="rId44"/>
+      <p:regular r:id="rId39"/>
+      <p:bold r:id="rId40"/>
+      <p:italic r:id="rId41"/>
+      <p:boldItalic r:id="rId42"/>
     </p:embeddedFont>
     <p:embeddedFont>
       <p:font typeface="Lato Light" panose="020F0502020204030203"/>
-      <p:regular r:id="rId45"/>
-      <p:bold r:id="rId46"/>
-      <p:italic r:id="rId47"/>
-      <p:boldItalic r:id="rId48"/>
+      <p:regular r:id="rId43"/>
+      <p:bold r:id="rId44"/>
+      <p:italic r:id="rId45"/>
+      <p:boldItalic r:id="rId46"/>
     </p:embeddedFont>
     <p:embeddedFont>
       <p:font typeface="Poppins SemiBold" panose="00000500000000000000"/>
-      <p:regular r:id="rId49"/>
-      <p:bold r:id="rId50"/>
-      <p:italic r:id="rId51"/>
-      <p:boldItalic r:id="rId52"/>
+      <p:regular r:id="rId47"/>
+      <p:bold r:id="rId48"/>
+      <p:italic r:id="rId49"/>
+      <p:boldItalic r:id="rId50"/>
     </p:embeddedFont>
     <p:embeddedFont>
       <p:font typeface="Poppins" panose="00000500000000000000" charset="0"/>
-      <p:regular r:id="rId53"/>
-      <p:bold r:id="rId54"/>
-      <p:italic r:id="rId55"/>
-      <p:boldItalic r:id="rId56"/>
+      <p:regular r:id="rId51"/>
+      <p:bold r:id="rId52"/>
+      <p:italic r:id="rId53"/>
+      <p:boldItalic r:id="rId54"/>
+    </p:embeddedFont>
+    <p:embeddedFont>
+      <p:font typeface="Lato" panose="020F0502020204030203" charset="0"/>
+      <p:regular r:id="rId55"/>
     </p:embeddedFont>
   </p:embeddedFontLst>
   <p:custDataLst>
-    <p:tags r:id="rId57"/>
+    <p:tags r:id="rId56"/>
   </p:custDataLst>
   <p:defaultTextStyle>
     <a:defPPr marR="0" lvl="0" algn="l" rtl="0">
@@ -316,7 +318,7 @@
   <p:extLst>
     <p:ext uri="{EFAFB233-063F-42B5-8137-9DF3F51BA10A}">
       <p15:sldGuideLst xmlns:p15="http://schemas.microsoft.com/office/powerpoint/2012/main">
-        <p15:guide id="1" orient="horz" pos="2198" userDrawn="1">
+        <p15:guide id="1" orient="horz" pos="2199" userDrawn="1">
           <p15:clr>
             <a:srgbClr val="000000"/>
           </p15:clr>
@@ -871,7 +873,7 @@
   <p:cSld>
     <p:spTree>
       <p:nvGrpSpPr>
-        <p:cNvPr id="248" name="Shape 248"/>
+        <p:cNvPr id="164" name="Shape 164"/>
         <p:cNvGrpSpPr/>
         <p:nvPr/>
       </p:nvGrpSpPr>
@@ -885,7 +887,7 @@
       </p:grpSpPr>
       <p:sp>
         <p:nvSpPr>
-          <p:cNvPr id="249" name="Google Shape;249;p8:notes"/>
+          <p:cNvPr id="165" name="Google Shape;165;p5:notes"/>
           <p:cNvSpPr txBox="1"/>
           <p:nvPr>
             <p:ph type="body" idx="1"/>
@@ -920,7 +922,7 @@
       </p:sp>
       <p:sp>
         <p:nvSpPr>
-          <p:cNvPr id="250" name="Google Shape;250;p8:notes"/>
+          <p:cNvPr id="166" name="Google Shape;166;p5:notes"/>
           <p:cNvSpPr/>
           <p:nvPr>
             <p:ph type="sldImg" idx="2"/>
@@ -970,7 +972,7 @@
   <p:cSld>
     <p:spTree>
       <p:nvGrpSpPr>
-        <p:cNvPr id="298" name="Shape 298"/>
+        <p:cNvPr id="248" name="Shape 248"/>
         <p:cNvGrpSpPr/>
         <p:nvPr/>
       </p:nvGrpSpPr>
@@ -984,7 +986,7 @@
       </p:grpSpPr>
       <p:sp>
         <p:nvSpPr>
-          <p:cNvPr id="299" name="Google Shape;299;p10:notes"/>
+          <p:cNvPr id="249" name="Google Shape;249;p8:notes"/>
           <p:cNvSpPr txBox="1"/>
           <p:nvPr>
             <p:ph type="body" idx="1"/>
@@ -1019,7 +1021,7 @@
       </p:sp>
       <p:sp>
         <p:nvSpPr>
-          <p:cNvPr id="300" name="Google Shape;300;p10:notes"/>
+          <p:cNvPr id="250" name="Google Shape;250;p8:notes"/>
           <p:cNvSpPr/>
           <p:nvPr>
             <p:ph type="sldImg" idx="2"/>
@@ -1065,6 +1067,105 @@
 </file>
 
 <file path=ppt/notesSlides/notesSlide12.xml><?xml version="1.0" encoding="utf-8"?>
+<p:notes xmlns:a="http://schemas.openxmlformats.org/drawingml/2006/main" xmlns:r="http://schemas.openxmlformats.org/officeDocument/2006/relationships" xmlns:p="http://schemas.openxmlformats.org/presentationml/2006/main" showMasterPhAnim="0" showMasterSp="0">
+  <p:cSld>
+    <p:spTree>
+      <p:nvGrpSpPr>
+        <p:cNvPr id="298" name="Shape 298"/>
+        <p:cNvGrpSpPr/>
+        <p:nvPr/>
+      </p:nvGrpSpPr>
+      <p:grpSpPr>
+        <a:xfrm>
+          <a:off x="0" y="0"/>
+          <a:ext cx="0" cy="0"/>
+          <a:chOff x="0" y="0"/>
+          <a:chExt cx="0" cy="0"/>
+        </a:xfrm>
+      </p:grpSpPr>
+      <p:sp>
+        <p:nvSpPr>
+          <p:cNvPr id="299" name="Google Shape;299;p10:notes"/>
+          <p:cNvSpPr txBox="1"/>
+          <p:nvPr>
+            <p:ph type="body" idx="1"/>
+          </p:nvPr>
+        </p:nvSpPr>
+        <p:spPr>
+          <a:xfrm>
+            <a:off x="685800" y="4343400"/>
+            <a:ext cx="5486400" cy="4114800"/>
+          </a:xfrm>
+          <a:prstGeom prst="rect">
+            <a:avLst/>
+          </a:prstGeom>
+        </p:spPr>
+        <p:txBody>
+          <a:bodyPr spcFirstLastPara="1" wrap="square" lIns="91425" tIns="91425" rIns="91425" bIns="91425" anchor="t" anchorCtr="0">
+            <a:noAutofit/>
+          </a:bodyPr>
+          <a:lstStyle/>
+          <a:p>
+            <a:pPr marL="0" lvl="0" indent="0" algn="l" rtl="0">
+              <a:spcBef>
+                <a:spcPts val="0"/>
+              </a:spcBef>
+              <a:spcAft>
+                <a:spcPts val="0"/>
+              </a:spcAft>
+              <a:buNone/>
+            </a:pPr>
+          </a:p>
+        </p:txBody>
+      </p:sp>
+      <p:sp>
+        <p:nvSpPr>
+          <p:cNvPr id="300" name="Google Shape;300;p10:notes"/>
+          <p:cNvSpPr/>
+          <p:nvPr>
+            <p:ph type="sldImg" idx="2"/>
+          </p:nvPr>
+        </p:nvSpPr>
+        <p:spPr>
+          <a:xfrm>
+            <a:off x="1143225" y="685800"/>
+            <a:ext cx="4572225" cy="3429000"/>
+          </a:xfrm>
+          <a:custGeom>
+            <a:avLst/>
+            <a:gdLst/>
+            <a:ahLst/>
+            <a:cxnLst/>
+            <a:rect l="l" t="t" r="r" b="b"/>
+            <a:pathLst>
+              <a:path w="120000" h="120000" extrusionOk="0">
+                <a:moveTo>
+                  <a:pt x="0" y="0"/>
+                </a:moveTo>
+                <a:lnTo>
+                  <a:pt x="120000" y="0"/>
+                </a:lnTo>
+                <a:lnTo>
+                  <a:pt x="120000" y="120000"/>
+                </a:lnTo>
+                <a:lnTo>
+                  <a:pt x="0" y="120000"/>
+                </a:lnTo>
+                <a:close/>
+              </a:path>
+            </a:pathLst>
+          </a:custGeom>
+        </p:spPr>
+      </p:sp>
+    </p:spTree>
+  </p:cSld>
+  <p:clrMapOvr>
+    <a:masterClrMapping/>
+  </p:clrMapOvr>
+</p:notes>
+</file>
+
+<file path=ppt/notesSlides/notesSlide13.xml><?xml version="1.0" encoding="utf-8"?>
 <p:notes xmlns:a="http://schemas.openxmlformats.org/drawingml/2006/main" xmlns:r="http://schemas.openxmlformats.org/officeDocument/2006/relationships" xmlns:p="http://schemas.openxmlformats.org/presentationml/2006/main" showMasterPhAnim="0" showMasterSp="0">
   <p:cSld>
     <p:spTree>
@@ -18077,7 +18178,7 @@
       </p:sp>
       <p:pic>
         <p:nvPicPr>
-          <p:cNvPr id="1" name="Image 0" descr="spring-boot-logo"/>
+          <p:cNvPr id="17" name="Image 16" descr="spring-boot-logo"/>
           <p:cNvPicPr>
             <a:picLocks noChangeAspect="1"/>
           </p:cNvPicPr>
@@ -19777,7 +19878,7 @@
       </p:sp>
       <p:pic>
         <p:nvPicPr>
-          <p:cNvPr id="1" name="Google Shape;108;p14" descr="image.png"/>
+          <p:cNvPr id="4" name="Google Shape;108;p14" descr="image.png"/>
           <p:cNvPicPr preferRelativeResize="0"/>
           <p:nvPr/>
         </p:nvPicPr>
@@ -19939,6 +20040,1857 @@
 </file>
 
 <file path=ppt/slides/slide20.xml><?xml version="1.0" encoding="utf-8"?>
+<p:sld xmlns:a="http://schemas.openxmlformats.org/drawingml/2006/main" xmlns:r="http://schemas.openxmlformats.org/officeDocument/2006/relationships" xmlns:p="http://schemas.openxmlformats.org/presentationml/2006/main">
+  <p:cSld>
+    <p:bg>
+      <p:bgPr>
+        <a:solidFill>
+          <a:srgbClr val="F8FAFC"/>
+        </a:solidFill>
+        <a:effectLst/>
+      </p:bgPr>
+    </p:bg>
+    <p:spTree>
+      <p:nvGrpSpPr>
+        <p:cNvPr id="167" name="Shape 167"/>
+        <p:cNvGrpSpPr/>
+        <p:nvPr/>
+      </p:nvGrpSpPr>
+      <p:grpSpPr>
+        <a:xfrm>
+          <a:off x="0" y="0"/>
+          <a:ext cx="0" cy="0"/>
+          <a:chOff x="0" y="0"/>
+          <a:chExt cx="0" cy="0"/>
+        </a:xfrm>
+      </p:grpSpPr>
+      <p:pic>
+        <p:nvPicPr>
+          <p:cNvPr id="168" name="Google Shape;168;p17" descr="image.png"/>
+          <p:cNvPicPr preferRelativeResize="0"/>
+          <p:nvPr/>
+        </p:nvPicPr>
+        <p:blipFill rotWithShape="1">
+          <a:blip r:embed="rId1"/>
+          <a:srcRect/>
+          <a:stretch>
+            <a:fillRect/>
+          </a:stretch>
+        </p:blipFill>
+        <p:spPr>
+          <a:xfrm>
+            <a:off x="0" y="0"/>
+            <a:ext cx="12192000" cy="6858000"/>
+          </a:xfrm>
+          <a:prstGeom prst="rect">
+            <a:avLst/>
+          </a:prstGeom>
+          <a:noFill/>
+          <a:ln>
+            <a:noFill/>
+          </a:ln>
+        </p:spPr>
+      </p:pic>
+      <p:pic>
+        <p:nvPicPr>
+          <p:cNvPr id="169" name="Google Shape;169;p17" descr="image.png"/>
+          <p:cNvPicPr preferRelativeResize="0"/>
+          <p:nvPr/>
+        </p:nvPicPr>
+        <p:blipFill rotWithShape="1">
+          <a:blip r:embed="rId2"/>
+          <a:srcRect/>
+          <a:stretch>
+            <a:fillRect/>
+          </a:stretch>
+        </p:blipFill>
+        <p:spPr>
+          <a:xfrm>
+            <a:off x="571500" y="2129730"/>
+            <a:ext cx="11049000" cy="3400425"/>
+          </a:xfrm>
+          <a:prstGeom prst="rect">
+            <a:avLst/>
+          </a:prstGeom>
+          <a:noFill/>
+          <a:ln>
+            <a:noFill/>
+          </a:ln>
+        </p:spPr>
+      </p:pic>
+      <p:pic>
+        <p:nvPicPr>
+          <p:cNvPr id="170" name="Google Shape;170;p17" descr="image.png"/>
+          <p:cNvPicPr preferRelativeResize="0"/>
+          <p:nvPr/>
+        </p:nvPicPr>
+        <p:blipFill rotWithShape="1">
+          <a:blip r:embed="rId3"/>
+          <a:srcRect/>
+          <a:stretch>
+            <a:fillRect/>
+          </a:stretch>
+        </p:blipFill>
+        <p:spPr>
+          <a:xfrm>
+            <a:off x="571500" y="6134100"/>
+            <a:ext cx="11049000" cy="295275"/>
+          </a:xfrm>
+          <a:prstGeom prst="rect">
+            <a:avLst/>
+          </a:prstGeom>
+          <a:noFill/>
+          <a:ln>
+            <a:noFill/>
+          </a:ln>
+        </p:spPr>
+      </p:pic>
+      <p:sp>
+        <p:nvSpPr>
+          <p:cNvPr id="171" name="Google Shape;171;p17"/>
+          <p:cNvSpPr txBox="1"/>
+          <p:nvPr/>
+        </p:nvSpPr>
+        <p:spPr>
+          <a:xfrm>
+            <a:off x="571500" y="455613"/>
+            <a:ext cx="1019175" cy="184150"/>
+          </a:xfrm>
+          <a:prstGeom prst="rect">
+            <a:avLst/>
+          </a:prstGeom>
+          <a:noFill/>
+          <a:ln>
+            <a:noFill/>
+          </a:ln>
+        </p:spPr>
+        <p:txBody>
+          <a:bodyPr spcFirstLastPara="1" wrap="square" lIns="0" tIns="0" rIns="0" bIns="0" anchor="ctr" anchorCtr="0">
+            <a:spAutoFit/>
+          </a:bodyPr>
+          <a:lstStyle/>
+          <a:p>
+            <a:pPr marL="0" marR="0" lvl="0" indent="0" algn="l" rtl="0">
+              <a:spcBef>
+                <a:spcPts val="0"/>
+              </a:spcBef>
+              <a:spcAft>
+                <a:spcPts val="0"/>
+              </a:spcAft>
+              <a:buNone/>
+            </a:pPr>
+            <a:r>
+              <a:rPr lang="en-US" sz="1200" b="1" i="0" u="none" strike="noStrike" cap="none">
+                <a:solidFill>
+                  <a:srgbClr val="3B82F6"/>
+                </a:solidFill>
+                <a:latin typeface="Poppins" panose="00000500000000000000"/>
+                <a:ea typeface="Poppins" panose="00000500000000000000"/>
+                <a:cs typeface="Poppins" panose="00000500000000000000"/>
+                <a:sym typeface="Poppins" panose="00000500000000000000"/>
+              </a:rPr>
+              <a:t>RENTAL</a:t>
+            </a:r>
+            <a:endParaRPr lang="en-US" sz="1200" b="1" i="0" u="none" strike="noStrike" cap="none">
+              <a:solidFill>
+                <a:srgbClr val="F59E0B"/>
+              </a:solidFill>
+              <a:latin typeface="Poppins" panose="00000500000000000000"/>
+              <a:ea typeface="Poppins" panose="00000500000000000000"/>
+              <a:cs typeface="Poppins" panose="00000500000000000000"/>
+              <a:sym typeface="Poppins" panose="00000500000000000000"/>
+            </a:endParaRPr>
+          </a:p>
+        </p:txBody>
+      </p:sp>
+      <p:sp>
+        <p:nvSpPr>
+          <p:cNvPr id="172" name="Google Shape;172;p17"/>
+          <p:cNvSpPr txBox="1"/>
+          <p:nvPr/>
+        </p:nvSpPr>
+        <p:spPr>
+          <a:xfrm>
+            <a:off x="10082212" y="471487"/>
+            <a:ext cx="1538287" cy="152400"/>
+          </a:xfrm>
+          <a:prstGeom prst="rect">
+            <a:avLst/>
+          </a:prstGeom>
+          <a:noFill/>
+          <a:ln>
+            <a:noFill/>
+          </a:ln>
+        </p:spPr>
+        <p:txBody>
+          <a:bodyPr spcFirstLastPara="1" wrap="square" lIns="0" tIns="0" rIns="0" bIns="0" anchor="t" anchorCtr="0">
+            <a:spAutoFit/>
+          </a:bodyPr>
+          <a:lstStyle/>
+          <a:p>
+            <a:pPr marL="0" marR="0" lvl="0" indent="0" algn="l" rtl="0">
+              <a:spcBef>
+                <a:spcPts val="0"/>
+              </a:spcBef>
+              <a:spcAft>
+                <a:spcPts val="0"/>
+              </a:spcAft>
+              <a:buNone/>
+            </a:pPr>
+            <a:r>
+              <a:rPr lang="en-US" sz="975" b="0" i="0" u="none" strike="noStrike" cap="none">
+                <a:solidFill>
+                  <a:srgbClr val="475569"/>
+                </a:solidFill>
+                <a:latin typeface="Lato" panose="020F0502020204030203"/>
+                <a:ea typeface="Lato" panose="020F0502020204030203"/>
+                <a:cs typeface="Lato" panose="020F0502020204030203"/>
+                <a:sym typeface="Lato" panose="020F0502020204030203"/>
+              </a:rPr>
+              <a:t>ANALYSE COMPARATIVE</a:t>
+            </a:r>
+            <a:endParaRPr lang="en-US" sz="975" b="0" i="0" u="none" strike="noStrike" cap="none">
+              <a:solidFill>
+                <a:srgbClr val="475569"/>
+              </a:solidFill>
+              <a:latin typeface="Lato" panose="020F0502020204030203"/>
+              <a:ea typeface="Lato" panose="020F0502020204030203"/>
+              <a:cs typeface="Lato" panose="020F0502020204030203"/>
+              <a:sym typeface="Lato" panose="020F0502020204030203"/>
+            </a:endParaRPr>
+          </a:p>
+        </p:txBody>
+      </p:sp>
+      <p:sp>
+        <p:nvSpPr>
+          <p:cNvPr id="173" name="Google Shape;173;p17"/>
+          <p:cNvSpPr txBox="1"/>
+          <p:nvPr/>
+        </p:nvSpPr>
+        <p:spPr>
+          <a:xfrm>
+            <a:off x="571500" y="6286500"/>
+            <a:ext cx="3486150" cy="142875"/>
+          </a:xfrm>
+          <a:prstGeom prst="rect">
+            <a:avLst/>
+          </a:prstGeom>
+          <a:noFill/>
+          <a:ln>
+            <a:noFill/>
+          </a:ln>
+        </p:spPr>
+        <p:txBody>
+          <a:bodyPr spcFirstLastPara="1" wrap="square" lIns="0" tIns="0" rIns="0" bIns="0" anchor="t" anchorCtr="0">
+            <a:spAutoFit/>
+          </a:bodyPr>
+          <a:lstStyle/>
+          <a:p>
+            <a:pPr marL="0" marR="0" lvl="0" indent="0" algn="l" rtl="0">
+              <a:spcBef>
+                <a:spcPts val="0"/>
+              </a:spcBef>
+              <a:spcAft>
+                <a:spcPts val="0"/>
+              </a:spcAft>
+              <a:buNone/>
+            </a:pPr>
+            <a:r>
+              <a:rPr lang="en-US" sz="900" b="0" i="0" u="none" strike="noStrike" cap="none">
+                <a:solidFill>
+                  <a:srgbClr val="475569"/>
+                </a:solidFill>
+                <a:latin typeface="Lato" panose="020F0502020204030203"/>
+                <a:ea typeface="Lato" panose="020F0502020204030203"/>
+                <a:cs typeface="Lato" panose="020F0502020204030203"/>
+                <a:sym typeface="Lato" panose="020F0502020204030203"/>
+              </a:rPr>
+              <a:t>Ipnet Institute of Technology — Soutenance de Licence Professionnelle</a:t>
+            </a:r>
+            <a:endParaRPr lang="en-US" sz="900" b="0" i="0" u="none" strike="noStrike" cap="none">
+              <a:solidFill>
+                <a:srgbClr val="475569"/>
+              </a:solidFill>
+              <a:latin typeface="Lato" panose="020F0502020204030203"/>
+              <a:ea typeface="Lato" panose="020F0502020204030203"/>
+              <a:cs typeface="Lato" panose="020F0502020204030203"/>
+              <a:sym typeface="Lato" panose="020F0502020204030203"/>
+            </a:endParaRPr>
+          </a:p>
+        </p:txBody>
+      </p:sp>
+      <p:sp>
+        <p:nvSpPr>
+          <p:cNvPr id="174" name="Google Shape;174;p17"/>
+          <p:cNvSpPr txBox="1"/>
+          <p:nvPr/>
+        </p:nvSpPr>
+        <p:spPr>
+          <a:xfrm>
+            <a:off x="11487150" y="6286500"/>
+            <a:ext cx="133350" cy="138430"/>
+          </a:xfrm>
+          <a:prstGeom prst="rect">
+            <a:avLst/>
+          </a:prstGeom>
+          <a:noFill/>
+          <a:ln>
+            <a:noFill/>
+          </a:ln>
+        </p:spPr>
+        <p:txBody>
+          <a:bodyPr spcFirstLastPara="1" wrap="square" lIns="0" tIns="0" rIns="0" bIns="0" anchor="t" anchorCtr="0">
+            <a:spAutoFit/>
+          </a:bodyPr>
+          <a:lstStyle/>
+          <a:p>
+            <a:pPr marL="0" marR="0" lvl="0" indent="0" algn="l" rtl="0">
+              <a:spcBef>
+                <a:spcPts val="0"/>
+              </a:spcBef>
+              <a:spcAft>
+                <a:spcPts val="0"/>
+              </a:spcAft>
+              <a:buNone/>
+            </a:pPr>
+            <a:r>
+              <a:rPr lang="fr-FR" altLang="en-US" sz="900" b="1" i="0" u="none" strike="noStrike" cap="none">
+                <a:solidFill>
+                  <a:srgbClr val="3B82F6"/>
+                </a:solidFill>
+                <a:latin typeface="Lato" panose="020F0502020204030203"/>
+                <a:ea typeface="Lato" panose="020F0502020204030203"/>
+                <a:cs typeface="Lato" panose="020F0502020204030203"/>
+                <a:sym typeface="Lato" panose="020F0502020204030203"/>
+              </a:rPr>
+              <a:t>20</a:t>
+            </a:r>
+            <a:endParaRPr lang="fr-FR" altLang="en-US" sz="900" b="1" i="0" u="none" strike="noStrike" cap="none">
+              <a:solidFill>
+                <a:srgbClr val="3B82F6"/>
+              </a:solidFill>
+              <a:latin typeface="Lato" panose="020F0502020204030203"/>
+              <a:ea typeface="Lato" panose="020F0502020204030203"/>
+              <a:cs typeface="Lato" panose="020F0502020204030203"/>
+              <a:sym typeface="Lato" panose="020F0502020204030203"/>
+            </a:endParaRPr>
+          </a:p>
+        </p:txBody>
+      </p:sp>
+      <p:graphicFrame>
+        <p:nvGraphicFramePr>
+          <p:cNvPr id="175" name="Google Shape;175;p17"/>
+          <p:cNvGraphicFramePr/>
+          <p:nvPr>
+            <p:custDataLst>
+              <p:tags r:id="rId4"/>
+            </p:custDataLst>
+          </p:nvPr>
+        </p:nvGraphicFramePr>
+        <p:xfrm>
+          <a:off x="581025" y="2139315"/>
+          <a:ext cx="11040110" cy="3246120"/>
+        </p:xfrm>
+        <a:graphic>
+          <a:graphicData uri="http://schemas.openxmlformats.org/drawingml/2006/table">
+            <a:tbl>
+              <a:tblPr firstRow="1" bandRow="1">
+                <a:noFill/>
+                <a:tableStyleId>{5DAD3497-3041-4D27-8FF0-422A7831B682}</a:tableStyleId>
+              </a:tblPr>
+              <a:tblGrid>
+                <a:gridCol w="4110990"/>
+                <a:gridCol w="6929120"/>
+              </a:tblGrid>
+              <a:tr h="835660">
+                <a:tc>
+                  <a:txBody>
+                    <a:bodyPr/>
+                    <a:lstStyle/>
+                    <a:p>
+                      <a:pPr marL="0" marR="0" lvl="0" indent="0" algn="l" rtl="0">
+                        <a:spcBef>
+                          <a:spcPts val="0"/>
+                        </a:spcBef>
+                        <a:spcAft>
+                          <a:spcPts val="0"/>
+                        </a:spcAft>
+                        <a:buNone/>
+                      </a:pPr>
+                      <a:r>
+                        <a:rPr lang="fr-FR" altLang="en-US" sz="1800" b="1" i="0" u="none" strike="noStrike" cap="none">
+                          <a:solidFill>
+                            <a:srgbClr val="1E293B"/>
+                          </a:solidFill>
+                          <a:latin typeface="Lato" panose="020F0502020204030203"/>
+                          <a:ea typeface="Lato" panose="020F0502020204030203"/>
+                          <a:cs typeface="Lato" panose="020F0502020204030203"/>
+                          <a:sym typeface="Lato" panose="020F0502020204030203"/>
+                        </a:rPr>
+                        <a:t>Matériel</a:t>
+                      </a:r>
+                      <a:endParaRPr lang="fr-FR" altLang="en-US" sz="1800" b="1" i="0" u="none" strike="noStrike" cap="none">
+                        <a:solidFill>
+                          <a:srgbClr val="1E293B"/>
+                        </a:solidFill>
+                        <a:latin typeface="Lato" panose="020F0502020204030203"/>
+                        <a:ea typeface="Lato" panose="020F0502020204030203"/>
+                        <a:cs typeface="Lato" panose="020F0502020204030203"/>
+                        <a:sym typeface="Lato" panose="020F0502020204030203"/>
+                      </a:endParaRPr>
+                    </a:p>
+                  </a:txBody>
+                  <a:tcPr marL="63500" marR="63500" marT="25400" marB="25400" anchor="ctr">
+                    <a:lnL w="9525" cap="flat" cmpd="sng">
+                      <a:solidFill>
+                        <a:srgbClr val="000000">
+                          <a:alpha val="0"/>
+                        </a:srgbClr>
+                      </a:solidFill>
+                      <a:prstDash val="solid"/>
+                      <a:round/>
+                      <a:headEnd type="none" w="sm" len="sm"/>
+                      <a:tailEnd type="none" w="sm" len="sm"/>
+                    </a:lnL>
+                    <a:lnR w="9525" cap="flat" cmpd="sng">
+                      <a:solidFill>
+                        <a:srgbClr val="000000">
+                          <a:alpha val="0"/>
+                        </a:srgbClr>
+                      </a:solidFill>
+                      <a:prstDash val="solid"/>
+                      <a:round/>
+                      <a:headEnd type="none" w="sm" len="sm"/>
+                      <a:tailEnd type="none" w="sm" len="sm"/>
+                    </a:lnR>
+                    <a:lnT w="9525" cap="flat" cmpd="sng">
+                      <a:solidFill>
+                        <a:srgbClr val="000000">
+                          <a:alpha val="0"/>
+                        </a:srgbClr>
+                      </a:solidFill>
+                      <a:prstDash val="solid"/>
+                      <a:round/>
+                      <a:headEnd type="none" w="sm" len="sm"/>
+                      <a:tailEnd type="none" w="sm" len="sm"/>
+                    </a:lnT>
+                    <a:lnB w="9525" cap="flat" cmpd="sng">
+                      <a:solidFill>
+                        <a:srgbClr val="000000">
+                          <a:alpha val="0"/>
+                        </a:srgbClr>
+                      </a:solidFill>
+                      <a:prstDash val="solid"/>
+                      <a:round/>
+                      <a:headEnd type="none" w="sm" len="sm"/>
+                      <a:tailEnd type="none" w="sm" len="sm"/>
+                    </a:lnB>
+                    <a:solidFill>
+                      <a:srgbClr val="F1F5F9"/>
+                    </a:solidFill>
+                  </a:tcPr>
+                </a:tc>
+                <a:tc>
+                  <a:txBody>
+                    <a:bodyPr/>
+                    <a:lstStyle/>
+                    <a:p>
+                      <a:pPr marL="0" marR="0" lvl="0" indent="0" algn="l" rtl="0">
+                        <a:spcBef>
+                          <a:spcPts val="0"/>
+                        </a:spcBef>
+                        <a:spcAft>
+                          <a:spcPts val="0"/>
+                        </a:spcAft>
+                        <a:buNone/>
+                      </a:pPr>
+                      <a:r>
+                        <a:rPr lang="fr-FR" altLang="en-US" sz="1800" b="1" i="0" u="none" strike="noStrike" cap="none">
+                          <a:solidFill>
+                            <a:srgbClr val="1E293B"/>
+                          </a:solidFill>
+                          <a:latin typeface="Lato" panose="020F0502020204030203"/>
+                          <a:ea typeface="Lato" panose="020F0502020204030203"/>
+                          <a:cs typeface="Lato" panose="020F0502020204030203"/>
+                          <a:sym typeface="Lato" panose="020F0502020204030203"/>
+                        </a:rPr>
+                        <a:t>Caractéristiques</a:t>
+                      </a:r>
+                      <a:endParaRPr lang="fr-FR" altLang="en-US" sz="1800" b="1" i="0" u="none" strike="noStrike" cap="none">
+                        <a:solidFill>
+                          <a:srgbClr val="1E293B"/>
+                        </a:solidFill>
+                        <a:latin typeface="Lato" panose="020F0502020204030203"/>
+                        <a:ea typeface="Lato" panose="020F0502020204030203"/>
+                        <a:cs typeface="Lato" panose="020F0502020204030203"/>
+                        <a:sym typeface="Lato" panose="020F0502020204030203"/>
+                      </a:endParaRPr>
+                    </a:p>
+                  </a:txBody>
+                  <a:tcPr marL="63500" marR="63500" marT="25400" marB="25400" anchor="ctr">
+                    <a:lnL w="9525" cap="flat" cmpd="sng">
+                      <a:solidFill>
+                        <a:srgbClr val="000000">
+                          <a:alpha val="0"/>
+                        </a:srgbClr>
+                      </a:solidFill>
+                      <a:prstDash val="solid"/>
+                      <a:round/>
+                      <a:headEnd type="none" w="sm" len="sm"/>
+                      <a:tailEnd type="none" w="sm" len="sm"/>
+                    </a:lnL>
+                    <a:lnR w="9525" cap="flat" cmpd="sng">
+                      <a:solidFill>
+                        <a:srgbClr val="000000">
+                          <a:alpha val="0"/>
+                        </a:srgbClr>
+                      </a:solidFill>
+                      <a:prstDash val="solid"/>
+                      <a:round/>
+                      <a:headEnd type="none" w="sm" len="sm"/>
+                      <a:tailEnd type="none" w="sm" len="sm"/>
+                    </a:lnR>
+                    <a:lnT w="9525" cap="flat" cmpd="sng">
+                      <a:solidFill>
+                        <a:srgbClr val="000000">
+                          <a:alpha val="0"/>
+                        </a:srgbClr>
+                      </a:solidFill>
+                      <a:prstDash val="solid"/>
+                      <a:round/>
+                      <a:headEnd type="none" w="sm" len="sm"/>
+                      <a:tailEnd type="none" w="sm" len="sm"/>
+                    </a:lnT>
+                    <a:lnB w="9525" cap="flat" cmpd="sng">
+                      <a:solidFill>
+                        <a:srgbClr val="000000">
+                          <a:alpha val="0"/>
+                        </a:srgbClr>
+                      </a:solidFill>
+                      <a:prstDash val="solid"/>
+                      <a:round/>
+                      <a:headEnd type="none" w="sm" len="sm"/>
+                      <a:tailEnd type="none" w="sm" len="sm"/>
+                    </a:lnB>
+                    <a:solidFill>
+                      <a:srgbClr val="F1F5F9"/>
+                    </a:solidFill>
+                  </a:tcPr>
+                </a:tc>
+              </a:tr>
+              <a:tr h="1140460">
+                <a:tc>
+                  <a:txBody>
+                    <a:bodyPr/>
+                    <a:lstStyle/>
+                    <a:p>
+                      <a:pPr marL="0" marR="0" lvl="0" indent="0" algn="l" rtl="0">
+                        <a:spcBef>
+                          <a:spcPts val="0"/>
+                        </a:spcBef>
+                        <a:spcAft>
+                          <a:spcPts val="0"/>
+                        </a:spcAft>
+                        <a:buFont typeface="Arial" panose="020B0604020202020204" pitchFamily="34" charset="0"/>
+                        <a:buNone/>
+                      </a:pPr>
+                      <a:r>
+                        <a:rPr lang="fr-FR" altLang="en-US" sz="1800" b="1" i="0" u="none" strike="noStrike" cap="none">
+                          <a:solidFill>
+                            <a:srgbClr val="475569"/>
+                          </a:solidFill>
+                          <a:latin typeface="Lato" panose="020F0502020204030203"/>
+                          <a:ea typeface="Lato" panose="020F0502020204030203"/>
+                          <a:cs typeface="Lato" panose="020F0502020204030203"/>
+                          <a:sym typeface="Lato" panose="020F0502020204030203"/>
+                        </a:rPr>
+                        <a:t>Ordinateur (destiné au Bailleur)</a:t>
+                      </a:r>
+                      <a:endParaRPr lang="fr-FR" altLang="en-US" sz="1800" b="1" i="0" u="none" strike="noStrike" cap="none">
+                        <a:solidFill>
+                          <a:srgbClr val="475569"/>
+                        </a:solidFill>
+                        <a:latin typeface="Lato" panose="020F0502020204030203"/>
+                        <a:ea typeface="Lato" panose="020F0502020204030203"/>
+                        <a:cs typeface="Lato" panose="020F0502020204030203"/>
+                        <a:sym typeface="Lato" panose="020F0502020204030203"/>
+                      </a:endParaRPr>
+                    </a:p>
+                  </a:txBody>
+                  <a:tcPr marL="63500" marR="63500" marT="25400" marB="25400" anchor="ctr">
+                    <a:lnL w="9525" cap="flat" cmpd="sng">
+                      <a:solidFill>
+                        <a:srgbClr val="000000">
+                          <a:alpha val="0"/>
+                        </a:srgbClr>
+                      </a:solidFill>
+                      <a:prstDash val="solid"/>
+                      <a:round/>
+                      <a:headEnd type="none" w="sm" len="sm"/>
+                      <a:tailEnd type="none" w="sm" len="sm"/>
+                    </a:lnL>
+                    <a:lnR w="9525" cap="flat" cmpd="sng">
+                      <a:solidFill>
+                        <a:srgbClr val="000000">
+                          <a:alpha val="0"/>
+                        </a:srgbClr>
+                      </a:solidFill>
+                      <a:prstDash val="solid"/>
+                      <a:round/>
+                      <a:headEnd type="none" w="sm" len="sm"/>
+                      <a:tailEnd type="none" w="sm" len="sm"/>
+                    </a:lnR>
+                    <a:lnT w="9525" cap="flat" cmpd="sng">
+                      <a:solidFill>
+                        <a:srgbClr val="000000">
+                          <a:alpha val="0"/>
+                        </a:srgbClr>
+                      </a:solidFill>
+                      <a:prstDash val="solid"/>
+                      <a:round/>
+                      <a:headEnd type="none" w="sm" len="sm"/>
+                      <a:tailEnd type="none" w="sm" len="sm"/>
+                    </a:lnT>
+                    <a:lnB w="9525" cap="flat" cmpd="sng">
+                      <a:solidFill>
+                        <a:srgbClr val="000000">
+                          <a:alpha val="0"/>
+                        </a:srgbClr>
+                      </a:solidFill>
+                      <a:prstDash val="solid"/>
+                      <a:round/>
+                      <a:headEnd type="none" w="sm" len="sm"/>
+                      <a:tailEnd type="none" w="sm" len="sm"/>
+                    </a:lnB>
+                  </a:tcPr>
+                </a:tc>
+                <a:tc>
+                  <a:txBody>
+                    <a:bodyPr/>
+                    <a:lstStyle/>
+                    <a:p>
+                      <a:pPr marL="285750" marR="0" lvl="0" indent="-285750" algn="l" rtl="0">
+                        <a:spcBef>
+                          <a:spcPts val="0"/>
+                        </a:spcBef>
+                        <a:spcAft>
+                          <a:spcPts val="0"/>
+                        </a:spcAft>
+                        <a:buFont typeface="Arial" panose="020B0604020202020204" pitchFamily="34" charset="0"/>
+                        <a:buChar char="•"/>
+                      </a:pPr>
+                      <a:r>
+                        <a:rPr lang="en-US" altLang="en-US" sz="1800" b="1" i="0" u="none" strike="noStrike" cap="none">
+                          <a:solidFill>
+                            <a:srgbClr val="475569"/>
+                          </a:solidFill>
+                          <a:latin typeface="Lato" panose="020F0502020204030203" charset="0"/>
+                          <a:ea typeface="Lato" panose="020F0502020204030203"/>
+                          <a:cs typeface="Lato" panose="020F0502020204030203" charset="0"/>
+                          <a:sym typeface="Lato" panose="020F0502020204030203"/>
+                        </a:rPr>
+                        <a:t>é</a:t>
+                      </a:r>
+                      <a:r>
+                        <a:rPr lang="en-US" altLang="fr-FR" sz="1800" b="1" i="0" u="none" strike="noStrike" cap="none">
+                          <a:solidFill>
+                            <a:srgbClr val="475569"/>
+                          </a:solidFill>
+                          <a:latin typeface="Lato" panose="020F0502020204030203" charset="0"/>
+                          <a:ea typeface="Lato" panose="020F0502020204030203"/>
+                          <a:cs typeface="Lato" panose="020F0502020204030203" charset="0"/>
+                          <a:sym typeface="Lato" panose="020F0502020204030203"/>
+                        </a:rPr>
+                        <a:t>quip</a:t>
+                      </a:r>
+                      <a:r>
+                        <a:rPr lang="en-US" altLang="en-US" sz="1800" b="1" i="0" u="none" strike="noStrike" cap="none">
+                          <a:solidFill>
+                            <a:srgbClr val="475569"/>
+                          </a:solidFill>
+                          <a:latin typeface="Lato" panose="020F0502020204030203" charset="0"/>
+                          <a:ea typeface="Lato" panose="020F0502020204030203"/>
+                          <a:cs typeface="Lato" panose="020F0502020204030203" charset="0"/>
+                          <a:sym typeface="Lato" panose="020F0502020204030203"/>
+                        </a:rPr>
+                        <a:t>é </a:t>
+                      </a:r>
+                      <a:r>
+                        <a:rPr lang="en-US" altLang="fr-FR" sz="1800" b="1" i="0" u="none" strike="noStrike" cap="none">
+                          <a:solidFill>
+                            <a:srgbClr val="475569"/>
+                          </a:solidFill>
+                          <a:latin typeface="Lato" panose="020F0502020204030203" charset="0"/>
+                          <a:ea typeface="Lato" panose="020F0502020204030203"/>
+                          <a:cs typeface="Lato" panose="020F0502020204030203" charset="0"/>
+                          <a:sym typeface="Lato" panose="020F0502020204030203"/>
+                        </a:rPr>
+                        <a:t>d'un navigateur internet moderne</a:t>
+                      </a:r>
+                      <a:r>
+                        <a:rPr lang="fr-FR" altLang="en-US" sz="1800" b="1" i="0" u="none" strike="noStrike" cap="none">
+                          <a:solidFill>
+                            <a:srgbClr val="475569"/>
+                          </a:solidFill>
+                          <a:latin typeface="Lato" panose="020F0502020204030203" charset="0"/>
+                          <a:ea typeface="Lato" panose="020F0502020204030203"/>
+                          <a:cs typeface="Lato" panose="020F0502020204030203" charset="0"/>
+                          <a:sym typeface="Lato" panose="020F0502020204030203"/>
+                        </a:rPr>
+                        <a:t> </a:t>
+                      </a:r>
+                      <a:r>
+                        <a:rPr lang="en-US" altLang="fr-FR" sz="1800" b="1" i="0" u="none" strike="noStrike" cap="none">
+                          <a:solidFill>
+                            <a:srgbClr val="475569"/>
+                          </a:solidFill>
+                          <a:latin typeface="Lato" panose="020F0502020204030203" charset="0"/>
+                          <a:ea typeface="Lato" panose="020F0502020204030203"/>
+                          <a:cs typeface="Lato" panose="020F0502020204030203" charset="0"/>
+                          <a:sym typeface="Lato" panose="020F0502020204030203"/>
+                        </a:rPr>
+                        <a:t>(Chrome, Firefox, Edge).</a:t>
+                      </a:r>
+                      <a:endParaRPr lang="en-US" altLang="fr-FR" sz="1800" b="1" i="0" u="none" strike="noStrike" cap="none">
+                        <a:solidFill>
+                          <a:srgbClr val="475569"/>
+                        </a:solidFill>
+                        <a:latin typeface="Lato" panose="020F0502020204030203" charset="0"/>
+                        <a:ea typeface="Lato" panose="020F0502020204030203"/>
+                        <a:cs typeface="Lato" panose="020F0502020204030203" charset="0"/>
+                        <a:sym typeface="Lato" panose="020F0502020204030203"/>
+                      </a:endParaRPr>
+                    </a:p>
+                    <a:p>
+                      <a:pPr marL="285750" lvl="0" indent="-285750" algn="l">
+                        <a:lnSpc>
+                          <a:spcPct val="100000"/>
+                        </a:lnSpc>
+                        <a:spcBef>
+                          <a:spcPts val="0"/>
+                        </a:spcBef>
+                        <a:spcAft>
+                          <a:spcPts val="0"/>
+                        </a:spcAft>
+                        <a:buSzTx/>
+                        <a:buFont typeface="Arial" panose="020B0604020202020204" pitchFamily="34" charset="0"/>
+                        <a:buChar char="•"/>
+                      </a:pPr>
+                      <a:r>
+                        <a:rPr lang="fr-FR" altLang="en-US" sz="1800" b="1">
+                          <a:solidFill>
+                            <a:srgbClr val="475569"/>
+                          </a:solidFill>
+                          <a:latin typeface="Lato" panose="020F0502020204030203"/>
+                          <a:ea typeface="Lato" panose="020F0502020204030203"/>
+                          <a:cs typeface="Lato" panose="020F0502020204030203"/>
+                          <a:sym typeface="+mn-ea"/>
+                        </a:rPr>
+                        <a:t>Mémoire RAM installée : 8,00 Go </a:t>
+                      </a:r>
+                      <a:endParaRPr lang="fr-FR" altLang="en-US" sz="1800" b="1">
+                        <a:solidFill>
+                          <a:srgbClr val="475569"/>
+                        </a:solidFill>
+                        <a:latin typeface="Lato" panose="020F0502020204030203"/>
+                        <a:ea typeface="Lato" panose="020F0502020204030203"/>
+                        <a:cs typeface="Lato" panose="020F0502020204030203"/>
+                      </a:endParaRPr>
+                    </a:p>
+                    <a:p>
+                      <a:pPr marL="285750" lvl="0" indent="-285750" algn="l">
+                        <a:lnSpc>
+                          <a:spcPct val="100000"/>
+                        </a:lnSpc>
+                        <a:spcBef>
+                          <a:spcPts val="0"/>
+                        </a:spcBef>
+                        <a:spcAft>
+                          <a:spcPts val="0"/>
+                        </a:spcAft>
+                        <a:buSzTx/>
+                        <a:buFont typeface="Arial" panose="020B0604020202020204" pitchFamily="34" charset="0"/>
+                        <a:buChar char="•"/>
+                      </a:pPr>
+                      <a:r>
+                        <a:rPr lang="fr-FR" altLang="en-US" sz="1800" b="1">
+                          <a:solidFill>
+                            <a:srgbClr val="475569"/>
+                          </a:solidFill>
+                          <a:latin typeface="Lato" panose="020F0502020204030203"/>
+                          <a:ea typeface="Lato" panose="020F0502020204030203"/>
+                          <a:cs typeface="Lato" panose="020F0502020204030203"/>
+                          <a:sym typeface="+mn-ea"/>
+                        </a:rPr>
+                        <a:t>Disque dur SSD : 1 To</a:t>
+                      </a:r>
+                      <a:endParaRPr lang="fr-FR" altLang="en-US" sz="1800" b="1" i="0" u="none" strike="noStrike">
+                        <a:solidFill>
+                          <a:srgbClr val="475569"/>
+                        </a:solidFill>
+                        <a:latin typeface="Lato" panose="020F0502020204030203"/>
+                        <a:ea typeface="Lato" panose="020F0502020204030203"/>
+                        <a:cs typeface="Lato" panose="020F0502020204030203"/>
+                      </a:endParaRPr>
+                    </a:p>
+                    <a:p>
+                      <a:pPr marL="285750" lvl="0" indent="-285750" algn="l">
+                        <a:lnSpc>
+                          <a:spcPct val="100000"/>
+                        </a:lnSpc>
+                        <a:spcBef>
+                          <a:spcPts val="0"/>
+                        </a:spcBef>
+                        <a:spcAft>
+                          <a:spcPts val="0"/>
+                        </a:spcAft>
+                        <a:buSzTx/>
+                        <a:buFont typeface="Arial" panose="020B0604020202020204" pitchFamily="34" charset="0"/>
+                        <a:buChar char="•"/>
+                      </a:pPr>
+                      <a:r>
+                        <a:rPr lang="fr-FR" altLang="en-US" sz="1800" b="1">
+                          <a:solidFill>
+                            <a:srgbClr val="475569"/>
+                          </a:solidFill>
+                          <a:latin typeface="Lato" panose="020F0502020204030203"/>
+                          <a:ea typeface="Lato" panose="020F0502020204030203"/>
+                          <a:cs typeface="Lato" panose="020F0502020204030203"/>
+                          <a:sym typeface="+mn-ea"/>
+                        </a:rPr>
+                        <a:t>Type du système : Système d’exploitation 64 bits, processeur x64 </a:t>
+                      </a:r>
+                      <a:endParaRPr lang="fr-FR" altLang="en-US" sz="1800" b="1">
+                        <a:solidFill>
+                          <a:srgbClr val="475569"/>
+                        </a:solidFill>
+                        <a:latin typeface="Lato" panose="020F0502020204030203"/>
+                        <a:ea typeface="Lato" panose="020F0502020204030203"/>
+                        <a:cs typeface="Lato" panose="020F0502020204030203"/>
+                      </a:endParaRPr>
+                    </a:p>
+                    <a:p>
+                      <a:pPr marL="285750" lvl="0" indent="-285750" algn="l">
+                        <a:lnSpc>
+                          <a:spcPct val="100000"/>
+                        </a:lnSpc>
+                        <a:spcBef>
+                          <a:spcPts val="0"/>
+                        </a:spcBef>
+                        <a:spcAft>
+                          <a:spcPts val="0"/>
+                        </a:spcAft>
+                        <a:buSzTx/>
+                        <a:buFont typeface="Arial" panose="020B0604020202020204" pitchFamily="34" charset="0"/>
+                        <a:buChar char="•"/>
+                      </a:pPr>
+                      <a:r>
+                        <a:rPr lang="fr-FR" altLang="en-US" sz="1800" b="1">
+                          <a:solidFill>
+                            <a:srgbClr val="475569"/>
+                          </a:solidFill>
+                          <a:latin typeface="Lato" panose="020F0502020204030203"/>
+                          <a:ea typeface="Lato" panose="020F0502020204030203"/>
+                          <a:cs typeface="Lato" panose="020F0502020204030203"/>
+                          <a:sym typeface="+mn-ea"/>
+                        </a:rPr>
+                        <a:t>Système d’exploitation : Windows 11 ou 10</a:t>
+                      </a:r>
+                      <a:endParaRPr lang="fr-FR" altLang="en-US" sz="1800" b="1" i="0" u="none" strike="noStrike" cap="none">
+                        <a:solidFill>
+                          <a:srgbClr val="475569"/>
+                        </a:solidFill>
+                        <a:latin typeface="Lato" panose="020F0502020204030203"/>
+                        <a:ea typeface="Lato" panose="020F0502020204030203"/>
+                        <a:cs typeface="Lato" panose="020F0502020204030203"/>
+                        <a:sym typeface="+mn-ea"/>
+                      </a:endParaRPr>
+                    </a:p>
+                  </a:txBody>
+                  <a:tcPr marL="63500" marR="63500" marT="25400" marB="25400" anchor="ctr">
+                    <a:lnL w="9525" cap="flat" cmpd="sng">
+                      <a:solidFill>
+                        <a:srgbClr val="000000">
+                          <a:alpha val="0"/>
+                        </a:srgbClr>
+                      </a:solidFill>
+                      <a:prstDash val="solid"/>
+                      <a:round/>
+                      <a:headEnd type="none" w="sm" len="sm"/>
+                      <a:tailEnd type="none" w="sm" len="sm"/>
+                    </a:lnL>
+                    <a:lnR w="9525" cap="flat" cmpd="sng">
+                      <a:solidFill>
+                        <a:srgbClr val="000000">
+                          <a:alpha val="0"/>
+                        </a:srgbClr>
+                      </a:solidFill>
+                      <a:prstDash val="solid"/>
+                      <a:round/>
+                      <a:headEnd type="none" w="sm" len="sm"/>
+                      <a:tailEnd type="none" w="sm" len="sm"/>
+                    </a:lnR>
+                    <a:lnT w="9525" cap="flat" cmpd="sng">
+                      <a:solidFill>
+                        <a:srgbClr val="000000">
+                          <a:alpha val="0"/>
+                        </a:srgbClr>
+                      </a:solidFill>
+                      <a:prstDash val="solid"/>
+                      <a:round/>
+                      <a:headEnd type="none" w="sm" len="sm"/>
+                      <a:tailEnd type="none" w="sm" len="sm"/>
+                    </a:lnT>
+                    <a:lnB w="9525" cap="flat" cmpd="sng">
+                      <a:solidFill>
+                        <a:srgbClr val="000000">
+                          <a:alpha val="0"/>
+                        </a:srgbClr>
+                      </a:solidFill>
+                      <a:prstDash val="solid"/>
+                      <a:round/>
+                      <a:headEnd type="none" w="sm" len="sm"/>
+                      <a:tailEnd type="none" w="sm" len="sm"/>
+                    </a:lnB>
+                  </a:tcPr>
+                </a:tc>
+              </a:tr>
+              <a:tr h="1140460">
+                <a:tc>
+                  <a:txBody>
+                    <a:bodyPr/>
+                    <a:lstStyle/>
+                    <a:p>
+                      <a:pPr marL="0" marR="0" lvl="0" indent="0" algn="l" rtl="0">
+                        <a:spcBef>
+                          <a:spcPts val="0"/>
+                        </a:spcBef>
+                        <a:spcAft>
+                          <a:spcPts val="0"/>
+                        </a:spcAft>
+                        <a:buNone/>
+                      </a:pPr>
+                      <a:r>
+                        <a:rPr lang="fr-FR" altLang="en-US" sz="1800" b="1" i="0" u="none" strike="noStrike" cap="none">
+                          <a:solidFill>
+                            <a:srgbClr val="475569"/>
+                          </a:solidFill>
+                          <a:latin typeface="Lato" panose="020F0502020204030203"/>
+                          <a:ea typeface="Lato" panose="020F0502020204030203"/>
+                          <a:cs typeface="Lato" panose="020F0502020204030203"/>
+                          <a:sym typeface="Lato" panose="020F0502020204030203"/>
+                        </a:rPr>
+                        <a:t>Smartphone</a:t>
+                      </a:r>
+                      <a:r>
+                        <a:rPr lang="en-US" sz="1800" b="1" i="0" u="none" strike="noStrike" cap="none">
+                          <a:solidFill>
+                            <a:srgbClr val="475569"/>
+                          </a:solidFill>
+                          <a:latin typeface="Lato" panose="020F0502020204030203"/>
+                          <a:ea typeface="Lato" panose="020F0502020204030203"/>
+                          <a:cs typeface="Lato" panose="020F0502020204030203"/>
+                          <a:sym typeface="Lato" panose="020F0502020204030203"/>
+                        </a:rPr>
+                        <a:t>(</a:t>
+                      </a:r>
+                      <a:r>
+                        <a:rPr lang="fr-FR" altLang="en-US" sz="1800" b="1" i="0" u="none" strike="noStrike" cap="none">
+                          <a:solidFill>
+                            <a:srgbClr val="475569"/>
+                          </a:solidFill>
+                          <a:latin typeface="Lato" panose="020F0502020204030203"/>
+                          <a:ea typeface="Lato" panose="020F0502020204030203"/>
+                          <a:cs typeface="Lato" panose="020F0502020204030203"/>
+                          <a:sym typeface="Lato" panose="020F0502020204030203"/>
+                        </a:rPr>
+                        <a:t>Locataire</a:t>
+                      </a:r>
+                      <a:r>
+                        <a:rPr lang="en-US" sz="1800" b="1" i="0" u="none" strike="noStrike" cap="none">
+                          <a:solidFill>
+                            <a:srgbClr val="475569"/>
+                          </a:solidFill>
+                          <a:latin typeface="Lato" panose="020F0502020204030203"/>
+                          <a:ea typeface="Lato" panose="020F0502020204030203"/>
+                          <a:cs typeface="Lato" panose="020F0502020204030203"/>
+                          <a:sym typeface="Lato" panose="020F0502020204030203"/>
+                        </a:rPr>
+                        <a:t>)</a:t>
+                      </a:r>
+                      <a:endParaRPr lang="en-US" sz="1800" b="1" i="0" u="none" strike="noStrike" cap="none">
+                        <a:solidFill>
+                          <a:srgbClr val="475569"/>
+                        </a:solidFill>
+                        <a:latin typeface="Lato" panose="020F0502020204030203"/>
+                        <a:ea typeface="Lato" panose="020F0502020204030203"/>
+                        <a:cs typeface="Lato" panose="020F0502020204030203"/>
+                        <a:sym typeface="Lato" panose="020F0502020204030203"/>
+                      </a:endParaRPr>
+                    </a:p>
+                  </a:txBody>
+                  <a:tcPr marL="63500" marR="63500" marT="25400" marB="25400" anchor="ctr">
+                    <a:lnL w="9525" cap="flat" cmpd="sng">
+                      <a:solidFill>
+                        <a:srgbClr val="000000">
+                          <a:alpha val="0"/>
+                        </a:srgbClr>
+                      </a:solidFill>
+                      <a:prstDash val="solid"/>
+                      <a:round/>
+                      <a:headEnd type="none" w="sm" len="sm"/>
+                      <a:tailEnd type="none" w="sm" len="sm"/>
+                    </a:lnL>
+                    <a:lnR w="9525" cap="flat" cmpd="sng">
+                      <a:solidFill>
+                        <a:srgbClr val="000000">
+                          <a:alpha val="0"/>
+                        </a:srgbClr>
+                      </a:solidFill>
+                      <a:prstDash val="solid"/>
+                      <a:round/>
+                      <a:headEnd type="none" w="sm" len="sm"/>
+                      <a:tailEnd type="none" w="sm" len="sm"/>
+                    </a:lnR>
+                    <a:lnT w="9525" cap="flat" cmpd="sng">
+                      <a:solidFill>
+                        <a:srgbClr val="000000">
+                          <a:alpha val="0"/>
+                        </a:srgbClr>
+                      </a:solidFill>
+                      <a:prstDash val="solid"/>
+                      <a:round/>
+                      <a:headEnd type="none" w="sm" len="sm"/>
+                      <a:tailEnd type="none" w="sm" len="sm"/>
+                    </a:lnT>
+                    <a:lnB w="9525" cap="flat" cmpd="sng">
+                      <a:solidFill>
+                        <a:srgbClr val="000000">
+                          <a:alpha val="0"/>
+                        </a:srgbClr>
+                      </a:solidFill>
+                      <a:prstDash val="solid"/>
+                      <a:round/>
+                      <a:headEnd type="none" w="sm" len="sm"/>
+                      <a:tailEnd type="none" w="sm" len="sm"/>
+                    </a:lnB>
+                  </a:tcPr>
+                </a:tc>
+                <a:tc>
+                  <a:txBody>
+                    <a:bodyPr/>
+                    <a:lstStyle/>
+                    <a:p>
+                      <a:pPr marL="0" marR="0" lvl="0" indent="0" algn="l" rtl="0">
+                        <a:spcBef>
+                          <a:spcPts val="0"/>
+                        </a:spcBef>
+                        <a:spcAft>
+                          <a:spcPts val="0"/>
+                        </a:spcAft>
+                        <a:buNone/>
+                      </a:pPr>
+                      <a:r>
+                        <a:rPr lang="en-US" altLang="fr-FR" sz="1800" b="0" i="0" u="none" strike="noStrike" cap="none">
+                          <a:solidFill>
+                            <a:srgbClr val="475569"/>
+                          </a:solidFill>
+                          <a:latin typeface="Lato" panose="020F0502020204030203"/>
+                          <a:ea typeface="Lato" panose="020F0502020204030203"/>
+                          <a:cs typeface="Lato" panose="020F0502020204030203"/>
+                          <a:sym typeface="Lato" panose="020F0502020204030203"/>
+                        </a:rPr>
+                        <a:t>Smartphone </a:t>
+                      </a:r>
+                      <a:r>
+                        <a:rPr lang="en-US" altLang="en-US" sz="1800" b="0" i="0" u="none" strike="noStrike" cap="none">
+                          <a:solidFill>
+                            <a:srgbClr val="475569"/>
+                          </a:solidFill>
+                          <a:latin typeface="Lato" panose="020F0502020204030203"/>
+                          <a:ea typeface="Lato" panose="020F0502020204030203"/>
+                          <a:cs typeface="Lato" panose="020F0502020204030203"/>
+                          <a:sym typeface="Lato" panose="020F0502020204030203"/>
+                        </a:rPr>
+                        <a:t>é</a:t>
+                      </a:r>
+                      <a:r>
+                        <a:rPr lang="en-US" altLang="fr-FR" sz="1800" b="0" i="0" u="none" strike="noStrike" cap="none">
+                          <a:solidFill>
+                            <a:srgbClr val="475569"/>
+                          </a:solidFill>
+                          <a:latin typeface="Lato" panose="020F0502020204030203"/>
+                          <a:ea typeface="Lato" panose="020F0502020204030203"/>
+                          <a:cs typeface="Lato" panose="020F0502020204030203"/>
+                          <a:sym typeface="Lato" panose="020F0502020204030203"/>
+                        </a:rPr>
+                        <a:t>quip</a:t>
+                      </a:r>
+                      <a:r>
+                        <a:rPr lang="en-US" altLang="en-US" sz="1800" b="0" i="0" u="none" strike="noStrike" cap="none">
+                          <a:solidFill>
+                            <a:srgbClr val="475569"/>
+                          </a:solidFill>
+                          <a:latin typeface="Lato" panose="020F0502020204030203"/>
+                          <a:ea typeface="Lato" panose="020F0502020204030203"/>
+                          <a:cs typeface="Lato" panose="020F0502020204030203"/>
+                          <a:sym typeface="Lato" panose="020F0502020204030203"/>
+                        </a:rPr>
+                        <a:t>é </a:t>
+                      </a:r>
+                      <a:r>
+                        <a:rPr lang="en-US" altLang="fr-FR" sz="1800" b="0" i="0" u="none" strike="noStrike" cap="none">
+                          <a:solidFill>
+                            <a:srgbClr val="475569"/>
+                          </a:solidFill>
+                          <a:latin typeface="Lato" panose="020F0502020204030203"/>
+                          <a:ea typeface="Lato" panose="020F0502020204030203"/>
+                          <a:cs typeface="Lato" panose="020F0502020204030203"/>
+                          <a:sym typeface="Lato" panose="020F0502020204030203"/>
+                        </a:rPr>
+                        <a:t>du syst</a:t>
+                      </a:r>
+                      <a:r>
+                        <a:rPr lang="en-US" altLang="en-US" sz="1800" b="0" i="0" u="none" strike="noStrike" cap="none">
+                          <a:solidFill>
+                            <a:srgbClr val="475569"/>
+                          </a:solidFill>
+                          <a:latin typeface="Lato" panose="020F0502020204030203"/>
+                          <a:ea typeface="Lato" panose="020F0502020204030203"/>
+                          <a:cs typeface="Lato" panose="020F0502020204030203"/>
+                          <a:sym typeface="Lato" panose="020F0502020204030203"/>
+                        </a:rPr>
+                        <a:t>è</a:t>
+                      </a:r>
+                      <a:r>
+                        <a:rPr lang="en-US" altLang="fr-FR" sz="1800" b="0" i="0" u="none" strike="noStrike" cap="none">
+                          <a:solidFill>
+                            <a:srgbClr val="475569"/>
+                          </a:solidFill>
+                          <a:latin typeface="Lato" panose="020F0502020204030203"/>
+                          <a:ea typeface="Lato" panose="020F0502020204030203"/>
+                          <a:cs typeface="Lato" panose="020F0502020204030203"/>
+                          <a:sym typeface="Lato" panose="020F0502020204030203"/>
+                        </a:rPr>
+                        <a:t>me Android version 8.0 (Oreo) ou</a:t>
+                      </a:r>
+                      <a:endParaRPr lang="en-US" altLang="fr-FR" sz="1800" b="0" i="0" u="none" strike="noStrike" cap="none">
+                        <a:solidFill>
+                          <a:srgbClr val="475569"/>
+                        </a:solidFill>
+                        <a:latin typeface="Lato" panose="020F0502020204030203"/>
+                        <a:ea typeface="Lato" panose="020F0502020204030203"/>
+                        <a:cs typeface="Lato" panose="020F0502020204030203"/>
+                        <a:sym typeface="Lato" panose="020F0502020204030203"/>
+                      </a:endParaRPr>
+                    </a:p>
+                    <a:p>
+                      <a:pPr marL="0" marR="0" lvl="0" indent="0" algn="l" rtl="0">
+                        <a:spcBef>
+                          <a:spcPts val="0"/>
+                        </a:spcBef>
+                        <a:spcAft>
+                          <a:spcPts val="0"/>
+                        </a:spcAft>
+                        <a:buNone/>
+                      </a:pPr>
+                      <a:r>
+                        <a:rPr lang="en-US" altLang="fr-FR" sz="1800" b="0" i="0" u="none" strike="noStrike" cap="none">
+                          <a:solidFill>
+                            <a:srgbClr val="475569"/>
+                          </a:solidFill>
+                          <a:latin typeface="Lato" panose="020F0502020204030203"/>
+                          <a:ea typeface="Lato" panose="020F0502020204030203"/>
+                          <a:cs typeface="Lato" panose="020F0502020204030203"/>
+                          <a:sym typeface="Lato" panose="020F0502020204030203"/>
+                        </a:rPr>
+                        <a:t>sup</a:t>
+                      </a:r>
+                      <a:r>
+                        <a:rPr lang="en-US" altLang="en-US" sz="1800" b="0" i="0" u="none" strike="noStrike" cap="none">
+                          <a:solidFill>
+                            <a:srgbClr val="475569"/>
+                          </a:solidFill>
+                          <a:latin typeface="Lato" panose="020F0502020204030203"/>
+                          <a:ea typeface="Lato" panose="020F0502020204030203"/>
+                          <a:cs typeface="Lato" panose="020F0502020204030203"/>
+                          <a:sym typeface="Lato" panose="020F0502020204030203"/>
+                        </a:rPr>
+                        <a:t>é</a:t>
+                      </a:r>
+                      <a:r>
+                        <a:rPr lang="en-US" altLang="fr-FR" sz="1800" b="0" i="0" u="none" strike="noStrike" cap="none">
+                          <a:solidFill>
+                            <a:srgbClr val="475569"/>
+                          </a:solidFill>
+                          <a:latin typeface="Lato" panose="020F0502020204030203"/>
+                          <a:ea typeface="Lato" panose="020F0502020204030203"/>
+                          <a:cs typeface="Lato" panose="020F0502020204030203"/>
+                          <a:sym typeface="Lato" panose="020F0502020204030203"/>
+                        </a:rPr>
+                        <a:t>rieure.</a:t>
+                      </a:r>
+                      <a:endParaRPr lang="en-US" altLang="fr-FR" sz="1800" b="0" i="0" u="none" strike="noStrike" cap="none">
+                        <a:solidFill>
+                          <a:srgbClr val="475569"/>
+                        </a:solidFill>
+                        <a:latin typeface="Lato" panose="020F0502020204030203"/>
+                        <a:ea typeface="Lato" panose="020F0502020204030203"/>
+                        <a:cs typeface="Lato" panose="020F0502020204030203"/>
+                        <a:sym typeface="Lato" panose="020F0502020204030203"/>
+                      </a:endParaRPr>
+                    </a:p>
+                  </a:txBody>
+                  <a:tcPr marL="63500" marR="63500" marT="25400" marB="25400" anchor="ctr">
+                    <a:lnL w="9525" cap="flat" cmpd="sng">
+                      <a:solidFill>
+                        <a:srgbClr val="000000">
+                          <a:alpha val="0"/>
+                        </a:srgbClr>
+                      </a:solidFill>
+                      <a:prstDash val="solid"/>
+                      <a:round/>
+                      <a:headEnd type="none" w="sm" len="sm"/>
+                      <a:tailEnd type="none" w="sm" len="sm"/>
+                    </a:lnL>
+                    <a:lnR w="9525" cap="flat" cmpd="sng">
+                      <a:solidFill>
+                        <a:srgbClr val="000000">
+                          <a:alpha val="0"/>
+                        </a:srgbClr>
+                      </a:solidFill>
+                      <a:prstDash val="solid"/>
+                      <a:round/>
+                      <a:headEnd type="none" w="sm" len="sm"/>
+                      <a:tailEnd type="none" w="sm" len="sm"/>
+                    </a:lnR>
+                    <a:lnT w="9525" cap="flat" cmpd="sng">
+                      <a:solidFill>
+                        <a:srgbClr val="000000">
+                          <a:alpha val="0"/>
+                        </a:srgbClr>
+                      </a:solidFill>
+                      <a:prstDash val="solid"/>
+                      <a:round/>
+                      <a:headEnd type="none" w="sm" len="sm"/>
+                      <a:tailEnd type="none" w="sm" len="sm"/>
+                    </a:lnT>
+                    <a:lnB w="9525" cap="flat" cmpd="sng">
+                      <a:solidFill>
+                        <a:srgbClr val="000000">
+                          <a:alpha val="0"/>
+                        </a:srgbClr>
+                      </a:solidFill>
+                      <a:prstDash val="solid"/>
+                      <a:round/>
+                      <a:headEnd type="none" w="sm" len="sm"/>
+                      <a:tailEnd type="none" w="sm" len="sm"/>
+                    </a:lnB>
+                  </a:tcPr>
+                </a:tc>
+              </a:tr>
+            </a:tbl>
+          </a:graphicData>
+        </a:graphic>
+      </p:graphicFrame>
+      <p:sp>
+        <p:nvSpPr>
+          <p:cNvPr id="176" name="Google Shape;176;p17"/>
+          <p:cNvSpPr/>
+          <p:nvPr/>
+        </p:nvSpPr>
+        <p:spPr>
+          <a:xfrm>
+            <a:off x="581025" y="2796480"/>
+            <a:ext cx="2086867" cy="19050"/>
+          </a:xfrm>
+          <a:prstGeom prst="rect">
+            <a:avLst/>
+          </a:prstGeom>
+          <a:solidFill>
+            <a:srgbClr val="E2E8F0"/>
+          </a:solidFill>
+          <a:ln>
+            <a:noFill/>
+          </a:ln>
+        </p:spPr>
+        <p:txBody>
+          <a:bodyPr spcFirstLastPara="1" wrap="square" lIns="91425" tIns="45700" rIns="91425" bIns="45700" anchor="ctr" anchorCtr="0">
+            <a:noAutofit/>
+          </a:bodyPr>
+          <a:lstStyle/>
+          <a:p>
+            <a:pPr marL="0" marR="0" lvl="0" indent="0" algn="ctr" rtl="0">
+              <a:spcBef>
+                <a:spcPts val="0"/>
+              </a:spcBef>
+              <a:spcAft>
+                <a:spcPts val="0"/>
+              </a:spcAft>
+              <a:buNone/>
+            </a:pPr>
+            <a:endParaRPr sz="1800" b="0" i="0" u="none" strike="noStrike" cap="none">
+              <a:solidFill>
+                <a:schemeClr val="dk1"/>
+              </a:solidFill>
+              <a:latin typeface="Calibri" panose="020F0502020204030204"/>
+              <a:ea typeface="Calibri" panose="020F0502020204030204"/>
+              <a:cs typeface="Calibri" panose="020F0502020204030204"/>
+              <a:sym typeface="Calibri" panose="020F0502020204030204"/>
+            </a:endParaRPr>
+          </a:p>
+        </p:txBody>
+      </p:sp>
+      <p:sp>
+        <p:nvSpPr>
+          <p:cNvPr id="177" name="Google Shape;177;p17"/>
+          <p:cNvSpPr/>
+          <p:nvPr/>
+        </p:nvSpPr>
+        <p:spPr>
+          <a:xfrm>
+            <a:off x="2667892" y="2796480"/>
+            <a:ext cx="3516957" cy="19050"/>
+          </a:xfrm>
+          <a:prstGeom prst="rect">
+            <a:avLst/>
+          </a:prstGeom>
+          <a:solidFill>
+            <a:srgbClr val="E2E8F0"/>
+          </a:solidFill>
+          <a:ln>
+            <a:noFill/>
+          </a:ln>
+        </p:spPr>
+        <p:txBody>
+          <a:bodyPr spcFirstLastPara="1" wrap="square" lIns="91425" tIns="45700" rIns="91425" bIns="45700" anchor="ctr" anchorCtr="0">
+            <a:noAutofit/>
+          </a:bodyPr>
+          <a:lstStyle/>
+          <a:p>
+            <a:pPr marL="0" marR="0" lvl="0" indent="0" algn="ctr" rtl="0">
+              <a:spcBef>
+                <a:spcPts val="0"/>
+              </a:spcBef>
+              <a:spcAft>
+                <a:spcPts val="0"/>
+              </a:spcAft>
+              <a:buNone/>
+            </a:pPr>
+            <a:endParaRPr sz="1800" b="0" i="0" u="none" strike="noStrike" cap="none">
+              <a:solidFill>
+                <a:schemeClr val="dk1"/>
+              </a:solidFill>
+              <a:latin typeface="Calibri" panose="020F0502020204030204"/>
+              <a:ea typeface="Calibri" panose="020F0502020204030204"/>
+              <a:cs typeface="Calibri" panose="020F0502020204030204"/>
+              <a:sym typeface="Calibri" panose="020F0502020204030204"/>
+            </a:endParaRPr>
+          </a:p>
+        </p:txBody>
+      </p:sp>
+      <p:sp>
+        <p:nvSpPr>
+          <p:cNvPr id="178" name="Google Shape;178;p17"/>
+          <p:cNvSpPr/>
+          <p:nvPr/>
+        </p:nvSpPr>
+        <p:spPr>
+          <a:xfrm>
+            <a:off x="6184850" y="2796480"/>
+            <a:ext cx="3557438" cy="19050"/>
+          </a:xfrm>
+          <a:prstGeom prst="rect">
+            <a:avLst/>
+          </a:prstGeom>
+          <a:solidFill>
+            <a:srgbClr val="E2E8F0"/>
+          </a:solidFill>
+          <a:ln>
+            <a:noFill/>
+          </a:ln>
+        </p:spPr>
+        <p:txBody>
+          <a:bodyPr spcFirstLastPara="1" wrap="square" lIns="91425" tIns="45700" rIns="91425" bIns="45700" anchor="ctr" anchorCtr="0">
+            <a:noAutofit/>
+          </a:bodyPr>
+          <a:lstStyle/>
+          <a:p>
+            <a:pPr marL="0" marR="0" lvl="0" indent="0" algn="ctr" rtl="0">
+              <a:spcBef>
+                <a:spcPts val="0"/>
+              </a:spcBef>
+              <a:spcAft>
+                <a:spcPts val="0"/>
+              </a:spcAft>
+              <a:buNone/>
+            </a:pPr>
+            <a:endParaRPr sz="1800" b="0" i="0" u="none" strike="noStrike" cap="none">
+              <a:solidFill>
+                <a:schemeClr val="dk1"/>
+              </a:solidFill>
+              <a:latin typeface="Calibri" panose="020F0502020204030204"/>
+              <a:ea typeface="Calibri" panose="020F0502020204030204"/>
+              <a:cs typeface="Calibri" panose="020F0502020204030204"/>
+              <a:sym typeface="Calibri" panose="020F0502020204030204"/>
+            </a:endParaRPr>
+          </a:p>
+        </p:txBody>
+      </p:sp>
+      <p:sp>
+        <p:nvSpPr>
+          <p:cNvPr id="179" name="Google Shape;179;p17"/>
+          <p:cNvSpPr/>
+          <p:nvPr/>
+        </p:nvSpPr>
+        <p:spPr>
+          <a:xfrm>
+            <a:off x="9742289" y="2796480"/>
+            <a:ext cx="1868685" cy="19050"/>
+          </a:xfrm>
+          <a:prstGeom prst="rect">
+            <a:avLst/>
+          </a:prstGeom>
+          <a:solidFill>
+            <a:srgbClr val="E2E8F0"/>
+          </a:solidFill>
+          <a:ln>
+            <a:noFill/>
+          </a:ln>
+        </p:spPr>
+        <p:txBody>
+          <a:bodyPr spcFirstLastPara="1" wrap="square" lIns="91425" tIns="45700" rIns="91425" bIns="45700" anchor="ctr" anchorCtr="0">
+            <a:noAutofit/>
+          </a:bodyPr>
+          <a:lstStyle/>
+          <a:p>
+            <a:pPr marL="0" marR="0" lvl="0" indent="0" algn="ctr" rtl="0">
+              <a:spcBef>
+                <a:spcPts val="0"/>
+              </a:spcBef>
+              <a:spcAft>
+                <a:spcPts val="0"/>
+              </a:spcAft>
+              <a:buNone/>
+            </a:pPr>
+            <a:endParaRPr sz="1800" b="0" i="0" u="none" strike="noStrike" cap="none">
+              <a:solidFill>
+                <a:schemeClr val="dk1"/>
+              </a:solidFill>
+              <a:latin typeface="Calibri" panose="020F0502020204030204"/>
+              <a:ea typeface="Calibri" panose="020F0502020204030204"/>
+              <a:cs typeface="Calibri" panose="020F0502020204030204"/>
+              <a:sym typeface="Calibri" panose="020F0502020204030204"/>
+            </a:endParaRPr>
+          </a:p>
+        </p:txBody>
+      </p:sp>
+      <p:sp>
+        <p:nvSpPr>
+          <p:cNvPr id="180" name="Google Shape;180;p17"/>
+          <p:cNvSpPr/>
+          <p:nvPr/>
+        </p:nvSpPr>
+        <p:spPr>
+          <a:xfrm>
+            <a:off x="581025" y="3487042"/>
+            <a:ext cx="2086867" cy="9525"/>
+          </a:xfrm>
+          <a:prstGeom prst="rect">
+            <a:avLst/>
+          </a:prstGeom>
+          <a:solidFill>
+            <a:srgbClr val="E2E8F0"/>
+          </a:solidFill>
+          <a:ln>
+            <a:noFill/>
+          </a:ln>
+        </p:spPr>
+        <p:txBody>
+          <a:bodyPr spcFirstLastPara="1" wrap="square" lIns="91425" tIns="45700" rIns="91425" bIns="45700" anchor="ctr" anchorCtr="0">
+            <a:noAutofit/>
+          </a:bodyPr>
+          <a:lstStyle/>
+          <a:p>
+            <a:pPr marL="0" marR="0" lvl="0" indent="0" algn="ctr" rtl="0">
+              <a:spcBef>
+                <a:spcPts val="0"/>
+              </a:spcBef>
+              <a:spcAft>
+                <a:spcPts val="0"/>
+              </a:spcAft>
+              <a:buNone/>
+            </a:pPr>
+            <a:endParaRPr sz="1800" b="0" i="0" u="none" strike="noStrike" cap="none">
+              <a:solidFill>
+                <a:schemeClr val="dk1"/>
+              </a:solidFill>
+              <a:latin typeface="Calibri" panose="020F0502020204030204"/>
+              <a:ea typeface="Calibri" panose="020F0502020204030204"/>
+              <a:cs typeface="Calibri" panose="020F0502020204030204"/>
+              <a:sym typeface="Calibri" panose="020F0502020204030204"/>
+            </a:endParaRPr>
+          </a:p>
+        </p:txBody>
+      </p:sp>
+      <p:sp>
+        <p:nvSpPr>
+          <p:cNvPr id="182" name="Google Shape;182;p17"/>
+          <p:cNvSpPr/>
+          <p:nvPr/>
+        </p:nvSpPr>
+        <p:spPr>
+          <a:xfrm>
+            <a:off x="6184850" y="3487042"/>
+            <a:ext cx="3557438" cy="9525"/>
+          </a:xfrm>
+          <a:prstGeom prst="rect">
+            <a:avLst/>
+          </a:prstGeom>
+          <a:solidFill>
+            <a:srgbClr val="E2E8F0"/>
+          </a:solidFill>
+          <a:ln>
+            <a:noFill/>
+          </a:ln>
+        </p:spPr>
+        <p:txBody>
+          <a:bodyPr spcFirstLastPara="1" wrap="square" lIns="91425" tIns="45700" rIns="91425" bIns="45700" anchor="ctr" anchorCtr="0">
+            <a:noAutofit/>
+          </a:bodyPr>
+          <a:lstStyle/>
+          <a:p>
+            <a:pPr marL="0" marR="0" lvl="0" indent="0" algn="ctr" rtl="0">
+              <a:spcBef>
+                <a:spcPts val="0"/>
+              </a:spcBef>
+              <a:spcAft>
+                <a:spcPts val="0"/>
+              </a:spcAft>
+              <a:buNone/>
+            </a:pPr>
+            <a:endParaRPr sz="1800" b="0" i="0" u="none" strike="noStrike" cap="none">
+              <a:solidFill>
+                <a:schemeClr val="dk1"/>
+              </a:solidFill>
+              <a:latin typeface="Calibri" panose="020F0502020204030204"/>
+              <a:ea typeface="Calibri" panose="020F0502020204030204"/>
+              <a:cs typeface="Calibri" panose="020F0502020204030204"/>
+              <a:sym typeface="Calibri" panose="020F0502020204030204"/>
+            </a:endParaRPr>
+          </a:p>
+        </p:txBody>
+      </p:sp>
+      <p:sp>
+        <p:nvSpPr>
+          <p:cNvPr id="183" name="Google Shape;183;p17"/>
+          <p:cNvSpPr/>
+          <p:nvPr/>
+        </p:nvSpPr>
+        <p:spPr>
+          <a:xfrm>
+            <a:off x="9742289" y="3487042"/>
+            <a:ext cx="1868685" cy="9525"/>
+          </a:xfrm>
+          <a:prstGeom prst="rect">
+            <a:avLst/>
+          </a:prstGeom>
+          <a:solidFill>
+            <a:srgbClr val="E2E8F0"/>
+          </a:solidFill>
+          <a:ln>
+            <a:noFill/>
+          </a:ln>
+        </p:spPr>
+        <p:txBody>
+          <a:bodyPr spcFirstLastPara="1" wrap="square" lIns="91425" tIns="45700" rIns="91425" bIns="45700" anchor="ctr" anchorCtr="0">
+            <a:noAutofit/>
+          </a:bodyPr>
+          <a:lstStyle/>
+          <a:p>
+            <a:pPr marL="0" marR="0" lvl="0" indent="0" algn="ctr" rtl="0">
+              <a:spcBef>
+                <a:spcPts val="0"/>
+              </a:spcBef>
+              <a:spcAft>
+                <a:spcPts val="0"/>
+              </a:spcAft>
+              <a:buNone/>
+            </a:pPr>
+            <a:endParaRPr sz="1800" b="0" i="0" u="none" strike="noStrike" cap="none">
+              <a:solidFill>
+                <a:schemeClr val="dk1"/>
+              </a:solidFill>
+              <a:latin typeface="Calibri" panose="020F0502020204030204"/>
+              <a:ea typeface="Calibri" panose="020F0502020204030204"/>
+              <a:cs typeface="Calibri" panose="020F0502020204030204"/>
+              <a:sym typeface="Calibri" panose="020F0502020204030204"/>
+            </a:endParaRPr>
+          </a:p>
+        </p:txBody>
+      </p:sp>
+      <p:sp>
+        <p:nvSpPr>
+          <p:cNvPr id="184" name="Google Shape;184;p17"/>
+          <p:cNvSpPr/>
+          <p:nvPr/>
+        </p:nvSpPr>
+        <p:spPr>
+          <a:xfrm>
+            <a:off x="581025" y="4163317"/>
+            <a:ext cx="2086867" cy="9525"/>
+          </a:xfrm>
+          <a:prstGeom prst="rect">
+            <a:avLst/>
+          </a:prstGeom>
+          <a:solidFill>
+            <a:srgbClr val="E2E8F0"/>
+          </a:solidFill>
+          <a:ln>
+            <a:noFill/>
+          </a:ln>
+        </p:spPr>
+        <p:txBody>
+          <a:bodyPr spcFirstLastPara="1" wrap="square" lIns="91425" tIns="45700" rIns="91425" bIns="45700" anchor="ctr" anchorCtr="0">
+            <a:noAutofit/>
+          </a:bodyPr>
+          <a:lstStyle/>
+          <a:p>
+            <a:pPr marL="0" marR="0" lvl="0" indent="0" algn="ctr" rtl="0">
+              <a:spcBef>
+                <a:spcPts val="0"/>
+              </a:spcBef>
+              <a:spcAft>
+                <a:spcPts val="0"/>
+              </a:spcAft>
+              <a:buNone/>
+            </a:pPr>
+            <a:endParaRPr sz="1800" b="0" i="0" u="none" strike="noStrike" cap="none">
+              <a:solidFill>
+                <a:schemeClr val="dk1"/>
+              </a:solidFill>
+              <a:latin typeface="Calibri" panose="020F0502020204030204"/>
+              <a:ea typeface="Calibri" panose="020F0502020204030204"/>
+              <a:cs typeface="Calibri" panose="020F0502020204030204"/>
+              <a:sym typeface="Calibri" panose="020F0502020204030204"/>
+            </a:endParaRPr>
+          </a:p>
+        </p:txBody>
+      </p:sp>
+      <p:sp>
+        <p:nvSpPr>
+          <p:cNvPr id="187" name="Google Shape;187;p17"/>
+          <p:cNvSpPr/>
+          <p:nvPr/>
+        </p:nvSpPr>
+        <p:spPr>
+          <a:xfrm>
+            <a:off x="9742289" y="4163317"/>
+            <a:ext cx="1868685" cy="9525"/>
+          </a:xfrm>
+          <a:prstGeom prst="rect">
+            <a:avLst/>
+          </a:prstGeom>
+          <a:solidFill>
+            <a:srgbClr val="E2E8F0"/>
+          </a:solidFill>
+          <a:ln>
+            <a:noFill/>
+          </a:ln>
+        </p:spPr>
+        <p:txBody>
+          <a:bodyPr spcFirstLastPara="1" wrap="square" lIns="91425" tIns="45700" rIns="91425" bIns="45700" anchor="ctr" anchorCtr="0">
+            <a:noAutofit/>
+          </a:bodyPr>
+          <a:lstStyle/>
+          <a:p>
+            <a:pPr marL="0" marR="0" lvl="0" indent="0" algn="ctr" rtl="0">
+              <a:spcBef>
+                <a:spcPts val="0"/>
+              </a:spcBef>
+              <a:spcAft>
+                <a:spcPts val="0"/>
+              </a:spcAft>
+              <a:buNone/>
+            </a:pPr>
+            <a:endParaRPr sz="1800" b="0" i="0" u="none" strike="noStrike" cap="none">
+              <a:solidFill>
+                <a:schemeClr val="dk1"/>
+              </a:solidFill>
+              <a:latin typeface="Calibri" panose="020F0502020204030204"/>
+              <a:ea typeface="Calibri" panose="020F0502020204030204"/>
+              <a:cs typeface="Calibri" panose="020F0502020204030204"/>
+              <a:sym typeface="Calibri" panose="020F0502020204030204"/>
+            </a:endParaRPr>
+          </a:p>
+        </p:txBody>
+      </p:sp>
+      <p:sp>
+        <p:nvSpPr>
+          <p:cNvPr id="188" name="Google Shape;188;p17"/>
+          <p:cNvSpPr/>
+          <p:nvPr/>
+        </p:nvSpPr>
+        <p:spPr>
+          <a:xfrm>
+            <a:off x="581025" y="4839592"/>
+            <a:ext cx="2086867" cy="9525"/>
+          </a:xfrm>
+          <a:prstGeom prst="rect">
+            <a:avLst/>
+          </a:prstGeom>
+          <a:solidFill>
+            <a:srgbClr val="E2E8F0"/>
+          </a:solidFill>
+          <a:ln>
+            <a:noFill/>
+          </a:ln>
+        </p:spPr>
+        <p:txBody>
+          <a:bodyPr spcFirstLastPara="1" wrap="square" lIns="91425" tIns="45700" rIns="91425" bIns="45700" anchor="ctr" anchorCtr="0">
+            <a:noAutofit/>
+          </a:bodyPr>
+          <a:lstStyle/>
+          <a:p>
+            <a:pPr marL="0" marR="0" lvl="0" indent="0" algn="ctr" rtl="0">
+              <a:spcBef>
+                <a:spcPts val="0"/>
+              </a:spcBef>
+              <a:spcAft>
+                <a:spcPts val="0"/>
+              </a:spcAft>
+              <a:buNone/>
+            </a:pPr>
+            <a:endParaRPr sz="1800" b="0" i="0" u="none" strike="noStrike" cap="none">
+              <a:solidFill>
+                <a:schemeClr val="dk1"/>
+              </a:solidFill>
+              <a:latin typeface="Calibri" panose="020F0502020204030204"/>
+              <a:ea typeface="Calibri" panose="020F0502020204030204"/>
+              <a:cs typeface="Calibri" panose="020F0502020204030204"/>
+              <a:sym typeface="Calibri" panose="020F0502020204030204"/>
+            </a:endParaRPr>
+          </a:p>
+        </p:txBody>
+      </p:sp>
+      <p:sp>
+        <p:nvSpPr>
+          <p:cNvPr id="191" name="Google Shape;191;p17"/>
+          <p:cNvSpPr/>
+          <p:nvPr/>
+        </p:nvSpPr>
+        <p:spPr>
+          <a:xfrm>
+            <a:off x="9742289" y="4839592"/>
+            <a:ext cx="1868685" cy="9525"/>
+          </a:xfrm>
+          <a:prstGeom prst="rect">
+            <a:avLst/>
+          </a:prstGeom>
+          <a:solidFill>
+            <a:srgbClr val="E2E8F0"/>
+          </a:solidFill>
+          <a:ln>
+            <a:noFill/>
+          </a:ln>
+        </p:spPr>
+        <p:txBody>
+          <a:bodyPr spcFirstLastPara="1" wrap="square" lIns="91425" tIns="45700" rIns="91425" bIns="45700" anchor="ctr" anchorCtr="0">
+            <a:noAutofit/>
+          </a:bodyPr>
+          <a:lstStyle/>
+          <a:p>
+            <a:pPr marL="0" marR="0" lvl="0" indent="0" algn="ctr" rtl="0">
+              <a:spcBef>
+                <a:spcPts val="0"/>
+              </a:spcBef>
+              <a:spcAft>
+                <a:spcPts val="0"/>
+              </a:spcAft>
+              <a:buNone/>
+            </a:pPr>
+            <a:endParaRPr sz="1800" b="0" i="0" u="none" strike="noStrike" cap="none">
+              <a:solidFill>
+                <a:schemeClr val="dk1"/>
+              </a:solidFill>
+              <a:latin typeface="Calibri" panose="020F0502020204030204"/>
+              <a:ea typeface="Calibri" panose="020F0502020204030204"/>
+              <a:cs typeface="Calibri" panose="020F0502020204030204"/>
+              <a:sym typeface="Calibri" panose="020F0502020204030204"/>
+            </a:endParaRPr>
+          </a:p>
+        </p:txBody>
+      </p:sp>
+      <p:sp>
+        <p:nvSpPr>
+          <p:cNvPr id="200" name="Google Shape;200;p17"/>
+          <p:cNvSpPr txBox="1"/>
+          <p:nvPr/>
+        </p:nvSpPr>
+        <p:spPr>
+          <a:xfrm>
+            <a:off x="571500" y="1019175"/>
+            <a:ext cx="11601450" cy="497840"/>
+          </a:xfrm>
+          <a:prstGeom prst="rect">
+            <a:avLst/>
+          </a:prstGeom>
+          <a:noFill/>
+          <a:ln>
+            <a:noFill/>
+          </a:ln>
+        </p:spPr>
+        <p:txBody>
+          <a:bodyPr spcFirstLastPara="1" wrap="square" lIns="0" tIns="0" rIns="0" bIns="0" anchor="t" anchorCtr="0">
+            <a:spAutoFit/>
+          </a:bodyPr>
+          <a:lstStyle/>
+          <a:p>
+            <a:pPr marL="0" marR="0" lvl="0" indent="0" algn="l" rtl="0">
+              <a:lnSpc>
+                <a:spcPct val="120000"/>
+              </a:lnSpc>
+              <a:spcBef>
+                <a:spcPts val="0"/>
+              </a:spcBef>
+              <a:spcAft>
+                <a:spcPts val="0"/>
+              </a:spcAft>
+              <a:buNone/>
+            </a:pPr>
+            <a:r>
+              <a:rPr lang="fr-FR" altLang="en-US" sz="2700" b="1">
+                <a:solidFill>
+                  <a:srgbClr val="1E293B"/>
+                </a:solidFill>
+                <a:latin typeface="Poppins" panose="00000500000000000000"/>
+                <a:ea typeface="Poppins" panose="00000500000000000000"/>
+                <a:cs typeface="Poppins" panose="00000500000000000000"/>
+                <a:sym typeface="Poppins" panose="00000500000000000000"/>
+              </a:rPr>
+              <a:t>Matériel de base</a:t>
+            </a:r>
+            <a:endParaRPr lang="en-US" sz="2700" b="1" i="0" u="none" strike="noStrike" cap="none">
+              <a:solidFill>
+                <a:srgbClr val="1E293B"/>
+              </a:solidFill>
+              <a:latin typeface="Poppins" panose="00000500000000000000"/>
+              <a:ea typeface="Poppins" panose="00000500000000000000"/>
+              <a:cs typeface="Poppins" panose="00000500000000000000"/>
+              <a:sym typeface="Poppins" panose="00000500000000000000"/>
+            </a:endParaRPr>
+          </a:p>
+        </p:txBody>
+      </p:sp>
+    </p:spTree>
+  </p:cSld>
+  <p:clrMapOvr>
+    <a:masterClrMapping/>
+  </p:clrMapOvr>
+</p:sld>
+</file>
+
+<file path=ppt/slides/slide21.xml><?xml version="1.0" encoding="utf-8"?>
 <p:sld xmlns:a="http://schemas.openxmlformats.org/drawingml/2006/main" xmlns:r="http://schemas.openxmlformats.org/officeDocument/2006/relationships" xmlns:p="http://schemas.openxmlformats.org/presentationml/2006/main">
   <p:cSld>
     <p:bg>
@@ -20150,7 +22102,7 @@
                 <a:cs typeface="Lato" panose="020F0502020204030203"/>
                 <a:sym typeface="Lato" panose="020F0502020204030203"/>
               </a:rPr>
-              <a:t>19</a:t>
+              <a:t>21</a:t>
             </a:r>
             <a:endParaRPr lang="fr-FR" altLang="en-US" sz="900" b="1" i="0" u="none" strike="noStrike" cap="none">
               <a:solidFill>
@@ -20257,7 +22209,7 @@
 </p:sld>
 </file>
 
-<file path=ppt/slides/slide21.xml><?xml version="1.0" encoding="utf-8"?>
+<file path=ppt/slides/slide22.xml><?xml version="1.0" encoding="utf-8"?>
 <p:sld xmlns:a="http://schemas.openxmlformats.org/drawingml/2006/main" xmlns:r="http://schemas.openxmlformats.org/officeDocument/2006/relationships" xmlns:p="http://schemas.openxmlformats.org/presentationml/2006/main">
   <p:cSld>
     <p:bg>
@@ -20554,19 +22506,7 @@
                 <a:cs typeface="Lato" panose="020F0502020204030203"/>
                 <a:sym typeface="Lato" panose="020F0502020204030203"/>
               </a:rPr>
-              <a:t>2</a:t>
-            </a:r>
-            <a:r>
-              <a:rPr lang="en-US" sz="900" b="1" i="0" u="none" strike="noStrike" cap="none">
-                <a:solidFill>
-                  <a:srgbClr val="3B82F6"/>
-                </a:solidFill>
-                <a:latin typeface="Lato" panose="020F0502020204030203"/>
-                <a:ea typeface="Lato" panose="020F0502020204030203"/>
-                <a:cs typeface="Lato" panose="020F0502020204030203"/>
-                <a:sym typeface="Lato" panose="020F0502020204030203"/>
-              </a:rPr>
-              <a:t>0</a:t>
+              <a:t>22</a:t>
             </a:r>
             <a:endParaRPr lang="en-US" sz="900" b="1" i="0" u="none" strike="noStrike" cap="none">
               <a:solidFill>
@@ -20643,7 +22583,7 @@
       </p:sp>
       <p:pic>
         <p:nvPicPr>
-          <p:cNvPr id="1" name="Image 0"/>
+          <p:cNvPr id="2" name="Image 1"/>
           <p:cNvPicPr>
             <a:picLocks noChangeAspect="1"/>
           </p:cNvPicPr>
@@ -20665,158 +22605,6 @@
           </a:prstGeom>
         </p:spPr>
       </p:pic>
-    </p:spTree>
-  </p:cSld>
-  <p:clrMapOvr>
-    <a:masterClrMapping/>
-  </p:clrMapOvr>
-</p:sld>
-</file>
-
-<file path=ppt/slides/slide22.xml><?xml version="1.0" encoding="utf-8"?>
-<p:sld xmlns:a="http://schemas.openxmlformats.org/drawingml/2006/main" xmlns:r="http://schemas.openxmlformats.org/officeDocument/2006/relationships" xmlns:p="http://schemas.openxmlformats.org/presentationml/2006/main">
-  <p:cSld>
-    <p:spTree>
-      <p:nvGrpSpPr>
-        <p:cNvPr id="1" name=""/>
-        <p:cNvGrpSpPr/>
-        <p:nvPr/>
-      </p:nvGrpSpPr>
-      <p:grpSpPr/>
-      <p:pic>
-        <p:nvPicPr>
-          <p:cNvPr id="205" name="Google Shape;205;p18" descr="image.png"/>
-          <p:cNvPicPr preferRelativeResize="0"/>
-          <p:nvPr/>
-        </p:nvPicPr>
-        <p:blipFill rotWithShape="1">
-          <a:blip r:embed="rId1"/>
-          <a:srcRect/>
-          <a:stretch>
-            <a:fillRect/>
-          </a:stretch>
-        </p:blipFill>
-        <p:spPr>
-          <a:xfrm>
-            <a:off x="0" y="0"/>
-            <a:ext cx="12192000" cy="6858000"/>
-          </a:xfrm>
-          <a:prstGeom prst="rect">
-            <a:avLst/>
-          </a:prstGeom>
-          <a:noFill/>
-          <a:ln>
-            <a:noFill/>
-          </a:ln>
-        </p:spPr>
-      </p:pic>
-      <p:sp>
-        <p:nvSpPr>
-          <p:cNvPr id="210" name="Google Shape;210;p18"/>
-          <p:cNvSpPr txBox="1"/>
-          <p:nvPr/>
-        </p:nvSpPr>
-        <p:spPr>
-          <a:xfrm>
-            <a:off x="585470" y="455613"/>
-            <a:ext cx="1019175" cy="184150"/>
-          </a:xfrm>
-          <a:prstGeom prst="rect">
-            <a:avLst/>
-          </a:prstGeom>
-          <a:noFill/>
-          <a:ln>
-            <a:noFill/>
-          </a:ln>
-        </p:spPr>
-        <p:txBody>
-          <a:bodyPr spcFirstLastPara="1" wrap="square" lIns="0" tIns="0" rIns="0" bIns="0" anchor="ctr" anchorCtr="0">
-            <a:spAutoFit/>
-          </a:bodyPr>
-          <a:lstStyle/>
-          <a:p>
-            <a:pPr marL="0" marR="0" lvl="0" indent="0" algn="l" rtl="0">
-              <a:spcBef>
-                <a:spcPts val="0"/>
-              </a:spcBef>
-              <a:spcAft>
-                <a:spcPts val="0"/>
-              </a:spcAft>
-              <a:buNone/>
-            </a:pPr>
-            <a:r>
-              <a:rPr lang="en-US" sz="1200" b="1" i="0" u="none" strike="noStrike" cap="none">
-                <a:solidFill>
-                  <a:srgbClr val="3B82F6"/>
-                </a:solidFill>
-                <a:latin typeface="Poppins" panose="00000500000000000000"/>
-                <a:ea typeface="Poppins" panose="00000500000000000000"/>
-                <a:cs typeface="Poppins" panose="00000500000000000000"/>
-                <a:sym typeface="Poppins" panose="00000500000000000000"/>
-              </a:rPr>
-              <a:t>RENTAL</a:t>
-            </a:r>
-            <a:endParaRPr lang="en-US" sz="1200" b="1" i="0" u="none" strike="noStrike" cap="none">
-              <a:solidFill>
-                <a:srgbClr val="F59E0B"/>
-              </a:solidFill>
-              <a:latin typeface="Poppins" panose="00000500000000000000"/>
-              <a:ea typeface="Poppins" panose="00000500000000000000"/>
-              <a:cs typeface="Poppins" panose="00000500000000000000"/>
-              <a:sym typeface="Poppins" panose="00000500000000000000"/>
-            </a:endParaRPr>
-          </a:p>
-        </p:txBody>
-      </p:sp>
-      <p:sp>
-        <p:nvSpPr>
-          <p:cNvPr id="7" name="Titre 6"/>
-          <p:cNvSpPr/>
-          <p:nvPr>
-            <p:ph type="title"/>
-          </p:nvPr>
-        </p:nvSpPr>
-        <p:spPr>
-          <a:xfrm>
-            <a:off x="1747520" y="2536825"/>
-            <a:ext cx="9244330" cy="1722755"/>
-          </a:xfrm>
-          <a:ln>
-            <a:solidFill>
-              <a:schemeClr val="accent1"/>
-            </a:solidFill>
-          </a:ln>
-          <a:effectLst>
-            <a:reflection blurRad="6350" stA="50000" endA="300" endPos="55500" dist="50800" dir="5400000" sy="-100000" algn="bl" rotWithShape="0"/>
-          </a:effectLst>
-        </p:spPr>
-        <p:txBody>
-          <a:bodyPr>
-            <a:normAutofit/>
-          </a:bodyPr>
-          <a:p>
-            <a:r>
-              <a:rPr lang="fr-FR" altLang="en-US" sz="4800" b="1" cap="all">
-                <a:solidFill>
-                  <a:schemeClr val="tx1"/>
-                </a:solidFill>
-                <a:uFillTx/>
-                <a:latin typeface="Poppins" panose="00000500000000000000" charset="0"/>
-                <a:cs typeface="Poppins" panose="00000500000000000000" charset="0"/>
-              </a:rPr>
-              <a:t>Démonstration</a:t>
-            </a:r>
-            <a:endParaRPr lang="fr-FR" altLang="en-US" sz="4800" b="1" cap="all">
-              <a:solidFill>
-                <a:schemeClr val="tx1"/>
-              </a:solidFill>
-              <a:uFillTx/>
-              <a:latin typeface="Poppins" panose="00000500000000000000" charset="0"/>
-              <a:cs typeface="Poppins" panose="00000500000000000000" charset="0"/>
-            </a:endParaRPr>
-          </a:p>
-        </p:txBody>
-      </p:sp>
     </p:spTree>
   </p:cSld>
   <p:clrMapOvr>
@@ -20931,7 +22719,7 @@
         <p:spPr>
           <a:xfrm>
             <a:off x="1747520" y="2536825"/>
-            <a:ext cx="9650095" cy="1722755"/>
+            <a:ext cx="9244330" cy="1722755"/>
           </a:xfrm>
           <a:ln>
             <a:solidFill>
@@ -20956,7 +22744,7 @@
                 <a:latin typeface="Poppins" panose="00000500000000000000" charset="0"/>
                 <a:cs typeface="Poppins" panose="00000500000000000000" charset="0"/>
               </a:rPr>
-              <a:t>Conclusion &amp; perspectives</a:t>
+              <a:t>Démonstration</a:t>
             </a:r>
             <a:endParaRPr lang="fr-FR" altLang="en-US" sz="4800" b="1" cap="all">
               <a:solidFill>
@@ -21074,6 +22862,158 @@
       </p:sp>
       <p:sp>
         <p:nvSpPr>
+          <p:cNvPr id="7" name="Titre 6"/>
+          <p:cNvSpPr/>
+          <p:nvPr>
+            <p:ph type="title"/>
+          </p:nvPr>
+        </p:nvSpPr>
+        <p:spPr>
+          <a:xfrm>
+            <a:off x="1747520" y="2536825"/>
+            <a:ext cx="9650095" cy="1722755"/>
+          </a:xfrm>
+          <a:ln>
+            <a:solidFill>
+              <a:schemeClr val="accent1"/>
+            </a:solidFill>
+          </a:ln>
+          <a:effectLst>
+            <a:reflection blurRad="6350" stA="50000" endA="300" endPos="55500" dist="50800" dir="5400000" sy="-100000" algn="bl" rotWithShape="0"/>
+          </a:effectLst>
+        </p:spPr>
+        <p:txBody>
+          <a:bodyPr>
+            <a:normAutofit/>
+          </a:bodyPr>
+          <a:p>
+            <a:r>
+              <a:rPr lang="fr-FR" altLang="en-US" sz="4800" b="1" cap="all">
+                <a:solidFill>
+                  <a:schemeClr val="tx1"/>
+                </a:solidFill>
+                <a:uFillTx/>
+                <a:latin typeface="Poppins" panose="00000500000000000000" charset="0"/>
+                <a:cs typeface="Poppins" panose="00000500000000000000" charset="0"/>
+              </a:rPr>
+              <a:t>Conclusion &amp; perspectives</a:t>
+            </a:r>
+            <a:endParaRPr lang="fr-FR" altLang="en-US" sz="4800" b="1" cap="all">
+              <a:solidFill>
+                <a:schemeClr val="tx1"/>
+              </a:solidFill>
+              <a:uFillTx/>
+              <a:latin typeface="Poppins" panose="00000500000000000000" charset="0"/>
+              <a:cs typeface="Poppins" panose="00000500000000000000" charset="0"/>
+            </a:endParaRPr>
+          </a:p>
+        </p:txBody>
+      </p:sp>
+    </p:spTree>
+  </p:cSld>
+  <p:clrMapOvr>
+    <a:masterClrMapping/>
+  </p:clrMapOvr>
+</p:sld>
+</file>
+
+<file path=ppt/slides/slide25.xml><?xml version="1.0" encoding="utf-8"?>
+<p:sld xmlns:a="http://schemas.openxmlformats.org/drawingml/2006/main" xmlns:r="http://schemas.openxmlformats.org/officeDocument/2006/relationships" xmlns:p="http://schemas.openxmlformats.org/presentationml/2006/main">
+  <p:cSld>
+    <p:spTree>
+      <p:nvGrpSpPr>
+        <p:cNvPr id="1" name=""/>
+        <p:cNvGrpSpPr/>
+        <p:nvPr/>
+      </p:nvGrpSpPr>
+      <p:grpSpPr/>
+      <p:pic>
+        <p:nvPicPr>
+          <p:cNvPr id="205" name="Google Shape;205;p18" descr="image.png"/>
+          <p:cNvPicPr preferRelativeResize="0"/>
+          <p:nvPr/>
+        </p:nvPicPr>
+        <p:blipFill rotWithShape="1">
+          <a:blip r:embed="rId1"/>
+          <a:srcRect/>
+          <a:stretch>
+            <a:fillRect/>
+          </a:stretch>
+        </p:blipFill>
+        <p:spPr>
+          <a:xfrm>
+            <a:off x="0" y="0"/>
+            <a:ext cx="12192000" cy="6858000"/>
+          </a:xfrm>
+          <a:prstGeom prst="rect">
+            <a:avLst/>
+          </a:prstGeom>
+          <a:noFill/>
+          <a:ln>
+            <a:noFill/>
+          </a:ln>
+        </p:spPr>
+      </p:pic>
+      <p:sp>
+        <p:nvSpPr>
+          <p:cNvPr id="210" name="Google Shape;210;p18"/>
+          <p:cNvSpPr txBox="1"/>
+          <p:nvPr/>
+        </p:nvSpPr>
+        <p:spPr>
+          <a:xfrm>
+            <a:off x="585470" y="455613"/>
+            <a:ext cx="1019175" cy="184150"/>
+          </a:xfrm>
+          <a:prstGeom prst="rect">
+            <a:avLst/>
+          </a:prstGeom>
+          <a:noFill/>
+          <a:ln>
+            <a:noFill/>
+          </a:ln>
+        </p:spPr>
+        <p:txBody>
+          <a:bodyPr spcFirstLastPara="1" wrap="square" lIns="0" tIns="0" rIns="0" bIns="0" anchor="ctr" anchorCtr="0">
+            <a:spAutoFit/>
+          </a:bodyPr>
+          <a:lstStyle/>
+          <a:p>
+            <a:pPr marL="0" marR="0" lvl="0" indent="0" algn="l" rtl="0">
+              <a:spcBef>
+                <a:spcPts val="0"/>
+              </a:spcBef>
+              <a:spcAft>
+                <a:spcPts val="0"/>
+              </a:spcAft>
+              <a:buNone/>
+            </a:pPr>
+            <a:r>
+              <a:rPr lang="en-US" sz="1200" b="1" i="0" u="none" strike="noStrike" cap="none">
+                <a:solidFill>
+                  <a:srgbClr val="3B82F6"/>
+                </a:solidFill>
+                <a:latin typeface="Poppins" panose="00000500000000000000"/>
+                <a:ea typeface="Poppins" panose="00000500000000000000"/>
+                <a:cs typeface="Poppins" panose="00000500000000000000"/>
+                <a:sym typeface="Poppins" panose="00000500000000000000"/>
+              </a:rPr>
+              <a:t>RENTAL</a:t>
+            </a:r>
+            <a:endParaRPr lang="en-US" sz="1200" b="1" i="0" u="none" strike="noStrike" cap="none">
+              <a:solidFill>
+                <a:srgbClr val="F59E0B"/>
+              </a:solidFill>
+              <a:latin typeface="Poppins" panose="00000500000000000000"/>
+              <a:ea typeface="Poppins" panose="00000500000000000000"/>
+              <a:cs typeface="Poppins" panose="00000500000000000000"/>
+              <a:sym typeface="Poppins" panose="00000500000000000000"/>
+            </a:endParaRPr>
+          </a:p>
+        </p:txBody>
+      </p:sp>
+      <p:sp>
+        <p:nvSpPr>
           <p:cNvPr id="2" name="Titre 1"/>
           <p:cNvSpPr/>
           <p:nvPr>
@@ -21117,7 +23057,7 @@
               <a:t>ponse concr</a:t>
             </a:r>
             <a:r>
-              <a:rPr lang="" altLang="en-US" sz="2400">
+              <a:rPr lang="en-US" altLang="en-US" sz="2400">
                 <a:latin typeface="Times New Roman" panose="02020603050405020304" charset="0"/>
                 <a:cs typeface="Times New Roman" panose="02020603050405020304" charset="0"/>
               </a:rPr>
@@ -21231,6 +23171,145 @@
           </a:p>
         </p:txBody>
       </p:sp>
+      <p:pic>
+        <p:nvPicPr>
+          <p:cNvPr id="304" name="Google Shape;304;p22" descr="image.png"/>
+          <p:cNvPicPr preferRelativeResize="0"/>
+          <p:nvPr/>
+        </p:nvPicPr>
+        <p:blipFill rotWithShape="1">
+          <a:blip r:embed="rId2"/>
+          <a:srcRect/>
+          <a:stretch>
+            <a:fillRect/>
+          </a:stretch>
+        </p:blipFill>
+        <p:spPr>
+          <a:xfrm>
+            <a:off x="571500" y="6134100"/>
+            <a:ext cx="11049000" cy="295275"/>
+          </a:xfrm>
+          <a:prstGeom prst="rect">
+            <a:avLst/>
+          </a:prstGeom>
+          <a:noFill/>
+          <a:ln>
+            <a:noFill/>
+          </a:ln>
+        </p:spPr>
+      </p:pic>
+      <p:sp>
+        <p:nvSpPr>
+          <p:cNvPr id="3" name="Zone de texte 2"/>
+          <p:cNvSpPr txBox="1"/>
+          <p:nvPr/>
+        </p:nvSpPr>
+        <p:spPr>
+          <a:xfrm>
+            <a:off x="585470" y="6323330"/>
+            <a:ext cx="6096000" cy="229870"/>
+          </a:xfrm>
+          <a:prstGeom prst="rect">
+            <a:avLst/>
+          </a:prstGeom>
+          <a:noFill/>
+        </p:spPr>
+        <p:txBody>
+          <a:bodyPr wrap="square" rtlCol="0" anchor="t">
+            <a:spAutoFit/>
+          </a:bodyPr>
+          <a:p>
+            <a:pPr marL="0" marR="0" lvl="0" indent="0" algn="l" rtl="0">
+              <a:spcBef>
+                <a:spcPts val="0"/>
+              </a:spcBef>
+              <a:spcAft>
+                <a:spcPts val="0"/>
+              </a:spcAft>
+              <a:buNone/>
+            </a:pPr>
+            <a:r>
+              <a:rPr lang="en-US" sz="900">
+                <a:solidFill>
+                  <a:srgbClr val="475569"/>
+                </a:solidFill>
+                <a:latin typeface="Lato" panose="020F0502020204030203"/>
+                <a:ea typeface="Lato" panose="020F0502020204030203"/>
+                <a:cs typeface="Lato" panose="020F0502020204030203"/>
+                <a:sym typeface="Lato" panose="020F0502020204030203"/>
+              </a:rPr>
+              <a:t>Ipnet Institute of Technology — Soutenance de Licence Professionnelle</a:t>
+            </a:r>
+            <a:endParaRPr lang="en-US" altLang="en-US" sz="900">
+              <a:solidFill>
+                <a:srgbClr val="475569"/>
+              </a:solidFill>
+              <a:latin typeface="Lato" panose="020F0502020204030203"/>
+              <a:ea typeface="Lato" panose="020F0502020204030203"/>
+              <a:cs typeface="Lato" panose="020F0502020204030203"/>
+              <a:sym typeface="Lato" panose="020F0502020204030203"/>
+            </a:endParaRPr>
+          </a:p>
+        </p:txBody>
+      </p:sp>
+      <p:sp>
+        <p:nvSpPr>
+          <p:cNvPr id="308" name="Google Shape;308;p22"/>
+          <p:cNvSpPr txBox="1"/>
+          <p:nvPr/>
+        </p:nvSpPr>
+        <p:spPr>
+          <a:xfrm>
+            <a:off x="11487150" y="6286500"/>
+            <a:ext cx="133350" cy="138430"/>
+          </a:xfrm>
+          <a:prstGeom prst="rect">
+            <a:avLst/>
+          </a:prstGeom>
+          <a:noFill/>
+          <a:ln>
+            <a:noFill/>
+          </a:ln>
+        </p:spPr>
+        <p:txBody>
+          <a:bodyPr spcFirstLastPara="1" wrap="square" lIns="0" tIns="0" rIns="0" bIns="0" anchor="t" anchorCtr="0">
+            <a:spAutoFit/>
+          </a:bodyPr>
+          <a:lstStyle/>
+          <a:p>
+            <a:pPr marL="0" marR="0" lvl="0" indent="0" algn="l" rtl="0">
+              <a:spcBef>
+                <a:spcPts val="0"/>
+              </a:spcBef>
+              <a:spcAft>
+                <a:spcPts val="0"/>
+              </a:spcAft>
+              <a:buNone/>
+            </a:pPr>
+            <a:r>
+              <a:rPr lang="fr-FR" altLang="en-US" sz="900" b="1" i="0" u="none" strike="noStrike" cap="none">
+                <a:solidFill>
+                  <a:srgbClr val="3B82F6"/>
+                </a:solidFill>
+                <a:latin typeface="Lato" panose="020F0502020204030203"/>
+                <a:ea typeface="Lato" panose="020F0502020204030203"/>
+                <a:cs typeface="Lato" panose="020F0502020204030203"/>
+                <a:sym typeface="Lato" panose="020F0502020204030203"/>
+              </a:rPr>
+              <a:t>25</a:t>
+            </a:r>
+            <a:endParaRPr lang="en-US" sz="900" b="1" i="0" u="none" strike="noStrike" cap="none">
+              <a:solidFill>
+                <a:srgbClr val="3B82F6"/>
+              </a:solidFill>
+              <a:latin typeface="Lato" panose="020F0502020204030203"/>
+              <a:ea typeface="Lato" panose="020F0502020204030203"/>
+              <a:cs typeface="Lato" panose="020F0502020204030203"/>
+              <a:sym typeface="Lato" panose="020F0502020204030203"/>
+            </a:endParaRPr>
+          </a:p>
+        </p:txBody>
+      </p:sp>
     </p:spTree>
   </p:cSld>
   <p:clrMapOvr>
@@ -21239,7 +23318,7 @@
 </p:sld>
 </file>
 
-<file path=ppt/slides/slide25.xml><?xml version="1.0" encoding="utf-8"?>
+<file path=ppt/slides/slide26.xml><?xml version="1.0" encoding="utf-8"?>
 <p:sld xmlns:a="http://schemas.openxmlformats.org/drawingml/2006/main" xmlns:r="http://schemas.openxmlformats.org/officeDocument/2006/relationships" xmlns:p="http://schemas.openxmlformats.org/presentationml/2006/main">
   <p:cSld>
     <p:spTree>
@@ -21552,6 +23631,145 @@
           </a:prstGeom>
         </p:spPr>
       </p:pic>
+      <p:pic>
+        <p:nvPicPr>
+          <p:cNvPr id="304" name="Google Shape;304;p22" descr="image.png"/>
+          <p:cNvPicPr preferRelativeResize="0"/>
+          <p:nvPr/>
+        </p:nvPicPr>
+        <p:blipFill rotWithShape="1">
+          <a:blip r:embed="rId6"/>
+          <a:srcRect/>
+          <a:stretch>
+            <a:fillRect/>
+          </a:stretch>
+        </p:blipFill>
+        <p:spPr>
+          <a:xfrm>
+            <a:off x="571500" y="6134100"/>
+            <a:ext cx="11049000" cy="295275"/>
+          </a:xfrm>
+          <a:prstGeom prst="rect">
+            <a:avLst/>
+          </a:prstGeom>
+          <a:noFill/>
+          <a:ln>
+            <a:noFill/>
+          </a:ln>
+        </p:spPr>
+      </p:pic>
+      <p:sp>
+        <p:nvSpPr>
+          <p:cNvPr id="3" name="Zone de texte 2"/>
+          <p:cNvSpPr txBox="1"/>
+          <p:nvPr/>
+        </p:nvSpPr>
+        <p:spPr>
+          <a:xfrm>
+            <a:off x="585470" y="6323330"/>
+            <a:ext cx="6096000" cy="229870"/>
+          </a:xfrm>
+          <a:prstGeom prst="rect">
+            <a:avLst/>
+          </a:prstGeom>
+          <a:noFill/>
+        </p:spPr>
+        <p:txBody>
+          <a:bodyPr wrap="square" rtlCol="0" anchor="t">
+            <a:spAutoFit/>
+          </a:bodyPr>
+          <a:p>
+            <a:pPr marL="0" marR="0" lvl="0" indent="0" algn="l" rtl="0">
+              <a:spcBef>
+                <a:spcPts val="0"/>
+              </a:spcBef>
+              <a:spcAft>
+                <a:spcPts val="0"/>
+              </a:spcAft>
+              <a:buNone/>
+            </a:pPr>
+            <a:r>
+              <a:rPr lang="en-US" sz="900">
+                <a:solidFill>
+                  <a:srgbClr val="475569"/>
+                </a:solidFill>
+                <a:latin typeface="Lato" panose="020F0502020204030203"/>
+                <a:ea typeface="Lato" panose="020F0502020204030203"/>
+                <a:cs typeface="Lato" panose="020F0502020204030203"/>
+                <a:sym typeface="Lato" panose="020F0502020204030203"/>
+              </a:rPr>
+              <a:t>Ipnet Institute of Technology — Soutenance de Licence Professionnelle</a:t>
+            </a:r>
+            <a:endParaRPr lang="en-US" altLang="en-US" sz="900">
+              <a:solidFill>
+                <a:srgbClr val="475569"/>
+              </a:solidFill>
+              <a:latin typeface="Lato" panose="020F0502020204030203"/>
+              <a:ea typeface="Lato" panose="020F0502020204030203"/>
+              <a:cs typeface="Lato" panose="020F0502020204030203"/>
+              <a:sym typeface="Lato" panose="020F0502020204030203"/>
+            </a:endParaRPr>
+          </a:p>
+        </p:txBody>
+      </p:sp>
+      <p:sp>
+        <p:nvSpPr>
+          <p:cNvPr id="308" name="Google Shape;308;p22"/>
+          <p:cNvSpPr txBox="1"/>
+          <p:nvPr/>
+        </p:nvSpPr>
+        <p:spPr>
+          <a:xfrm>
+            <a:off x="11487150" y="6286500"/>
+            <a:ext cx="133350" cy="138430"/>
+          </a:xfrm>
+          <a:prstGeom prst="rect">
+            <a:avLst/>
+          </a:prstGeom>
+          <a:noFill/>
+          <a:ln>
+            <a:noFill/>
+          </a:ln>
+        </p:spPr>
+        <p:txBody>
+          <a:bodyPr spcFirstLastPara="1" wrap="square" lIns="0" tIns="0" rIns="0" bIns="0" anchor="t" anchorCtr="0">
+            <a:spAutoFit/>
+          </a:bodyPr>
+          <a:lstStyle/>
+          <a:p>
+            <a:pPr marL="0" marR="0" lvl="0" indent="0" algn="l" rtl="0">
+              <a:spcBef>
+                <a:spcPts val="0"/>
+              </a:spcBef>
+              <a:spcAft>
+                <a:spcPts val="0"/>
+              </a:spcAft>
+              <a:buNone/>
+            </a:pPr>
+            <a:r>
+              <a:rPr lang="fr-FR" altLang="en-US" sz="900" b="1" i="0" u="none" strike="noStrike" cap="none">
+                <a:solidFill>
+                  <a:srgbClr val="3B82F6"/>
+                </a:solidFill>
+                <a:latin typeface="Lato" panose="020F0502020204030203"/>
+                <a:ea typeface="Lato" panose="020F0502020204030203"/>
+                <a:cs typeface="Lato" panose="020F0502020204030203"/>
+                <a:sym typeface="Lato" panose="020F0502020204030203"/>
+              </a:rPr>
+              <a:t>26</a:t>
+            </a:r>
+            <a:endParaRPr lang="en-US" sz="900" b="1" i="0" u="none" strike="noStrike" cap="none">
+              <a:solidFill>
+                <a:srgbClr val="3B82F6"/>
+              </a:solidFill>
+              <a:latin typeface="Lato" panose="020F0502020204030203"/>
+              <a:ea typeface="Lato" panose="020F0502020204030203"/>
+              <a:cs typeface="Lato" panose="020F0502020204030203"/>
+              <a:sym typeface="Lato" panose="020F0502020204030203"/>
+            </a:endParaRPr>
+          </a:p>
+        </p:txBody>
+      </p:sp>
     </p:spTree>
   </p:cSld>
   <p:clrMapOvr>
@@ -21560,7 +23778,7 @@
 </p:sld>
 </file>
 
-<file path=ppt/slides/slide26.xml><?xml version="1.0" encoding="utf-8"?>
+<file path=ppt/slides/slide27.xml><?xml version="1.0" encoding="utf-8"?>
 <p:sld xmlns:a="http://schemas.openxmlformats.org/drawingml/2006/main" xmlns:r="http://schemas.openxmlformats.org/officeDocument/2006/relationships" xmlns:p="http://schemas.openxmlformats.org/presentationml/2006/main">
   <p:cSld>
     <p:bg>
@@ -21720,7 +23938,7 @@
       </p:sp>
       <p:pic>
         <p:nvPicPr>
-          <p:cNvPr id="1" name="Image 0" descr="WPS Photos(1)"/>
+          <p:cNvPr id="2" name="Image 1" descr="WPS Photos(1)"/>
           <p:cNvPicPr>
             <a:picLocks noChangeAspect="1"/>
           </p:cNvPicPr>
@@ -28900,7 +31118,8 @@
 
 <file path=ppt/tags/tag14.xml><?xml version="1.0" encoding="utf-8"?>
 <p:tagLst xmlns:p="http://schemas.openxmlformats.org/presentationml/2006/main">
-  <p:tag name="KSO_DOCER_RESOURCE_TRACE_INFO" val="{&quot;id&quot;:&quot;50059433&quot;,&quot;origin&quot;:0,&quot;type&quot;:&quot;icons&quot;,&quot;user&quot;:&quot;20358827511810&quot;}"/>
+  <p:tag name="TABLE_ENDDRAG_ORIGIN_RECT" val="869*269"/>
+  <p:tag name="TABLE_ENDDRAG_RECT" val="45*168*869*269"/>
 </p:tagLst>
 </file>
 
@@ -28911,6 +31130,12 @@
 </file>
 
 <file path=ppt/tags/tag16.xml><?xml version="1.0" encoding="utf-8"?>
+<p:tagLst xmlns:p="http://schemas.openxmlformats.org/presentationml/2006/main">
+  <p:tag name="KSO_DOCER_RESOURCE_TRACE_INFO" val="{&quot;id&quot;:&quot;50059433&quot;,&quot;origin&quot;:0,&quot;type&quot;:&quot;icons&quot;,&quot;user&quot;:&quot;20358827511810&quot;}"/>
+</p:tagLst>
+</file>
+
+<file path=ppt/tags/tag17.xml><?xml version="1.0" encoding="utf-8"?>
 <p:tagLst xmlns:p="http://schemas.openxmlformats.org/presentationml/2006/main">
   <p:tag name="resource_record_key" val="{&quot;10&quot;:[50059433]}"/>
 </p:tagLst>

--- a/Soutenance de Licence - GBANDI WAKE (1).pptx
+++ b/Soutenance de Licence - GBANDI WAKE (1).pptx
@@ -318,7 +318,7 @@
   <p:extLst>
     <p:ext uri="{EFAFB233-063F-42B5-8137-9DF3F51BA10A}">
       <p15:sldGuideLst xmlns:p15="http://schemas.microsoft.com/office/powerpoint/2012/main">
-        <p15:guide id="1" orient="horz" pos="2199" userDrawn="1">
+        <p15:guide id="1" orient="horz" pos="2160" userDrawn="1">
           <p15:clr>
             <a:srgbClr val="000000"/>
           </p15:clr>
@@ -13203,7 +13203,7 @@
         </p:blipFill>
         <p:spPr>
           <a:xfrm>
-            <a:off x="857250" y="5276850"/>
+            <a:off x="2165985" y="5326380"/>
             <a:ext cx="3417570" cy="873125"/>
           </a:xfrm>
           <a:prstGeom prst="rect">
@@ -13230,35 +13230,8 @@
         </p:blipFill>
         <p:spPr>
           <a:xfrm>
-            <a:off x="4476750" y="5276850"/>
+            <a:off x="7259955" y="5261610"/>
             <a:ext cx="3273425" cy="1121410"/>
-          </a:xfrm>
-          <a:prstGeom prst="rect">
-            <a:avLst/>
-          </a:prstGeom>
-          <a:noFill/>
-          <a:ln>
-            <a:noFill/>
-          </a:ln>
-        </p:spPr>
-      </p:pic>
-      <p:pic>
-        <p:nvPicPr>
-          <p:cNvPr id="88" name="Google Shape;88;p13" descr="image.png"/>
-          <p:cNvPicPr preferRelativeResize="0"/>
-          <p:nvPr/>
-        </p:nvPicPr>
-        <p:blipFill rotWithShape="1">
-          <a:blip r:embed="rId3"/>
-          <a:srcRect/>
-          <a:stretch>
-            <a:fillRect/>
-          </a:stretch>
-        </p:blipFill>
-        <p:spPr>
-          <a:xfrm>
-            <a:off x="8096250" y="5276850"/>
-            <a:ext cx="3333750" cy="996315"/>
           </a:xfrm>
           <a:prstGeom prst="rect">
             <a:avLst/>
@@ -13498,7 +13471,7 @@
         </p:nvSpPr>
         <p:spPr>
           <a:xfrm>
-            <a:off x="1085850" y="5419725"/>
+            <a:off x="2394585" y="5469255"/>
             <a:ext cx="2960370" cy="245745"/>
           </a:xfrm>
           <a:prstGeom prst="rect">
@@ -13556,7 +13529,7 @@
         </p:nvSpPr>
         <p:spPr>
           <a:xfrm>
-            <a:off x="1085850" y="5657850"/>
+            <a:off x="2394585" y="5707380"/>
             <a:ext cx="2819400" cy="307340"/>
           </a:xfrm>
           <a:prstGeom prst="rect">
@@ -13614,7 +13587,7 @@
         </p:nvSpPr>
         <p:spPr>
           <a:xfrm>
-            <a:off x="4705350" y="5419725"/>
+            <a:off x="7488555" y="5404485"/>
             <a:ext cx="2960370" cy="245745"/>
           </a:xfrm>
           <a:prstGeom prst="rect">
@@ -13672,7 +13645,7 @@
         </p:nvSpPr>
         <p:spPr>
           <a:xfrm>
-            <a:off x="4705350" y="5657850"/>
+            <a:off x="7488555" y="5642610"/>
             <a:ext cx="2819400" cy="615315"/>
           </a:xfrm>
           <a:prstGeom prst="rect">
@@ -13734,157 +13707,6 @@
               <a:t>Ingénieur Logiciel</a:t>
             </a:r>
             <a:endParaRPr lang="en-US" sz="2000" b="0" i="0" u="none" strike="noStrike" cap="none">
-              <a:solidFill>
-                <a:srgbClr val="F8FAFC"/>
-              </a:solidFill>
-              <a:latin typeface="Times New Roman" panose="02020603050405020304" charset="0"/>
-              <a:ea typeface="Lato" panose="020F0502020204030203"/>
-              <a:cs typeface="Times New Roman" panose="02020603050405020304" charset="0"/>
-              <a:sym typeface="Lato" panose="020F0502020204030203"/>
-            </a:endParaRPr>
-          </a:p>
-        </p:txBody>
-      </p:sp>
-      <p:sp>
-        <p:nvSpPr>
-          <p:cNvPr id="96" name="Google Shape;96;p13"/>
-          <p:cNvSpPr txBox="1"/>
-          <p:nvPr/>
-        </p:nvSpPr>
-        <p:spPr>
-          <a:xfrm>
-            <a:off x="8324850" y="5419725"/>
-            <a:ext cx="2960370" cy="245745"/>
-          </a:xfrm>
-          <a:prstGeom prst="rect">
-            <a:avLst/>
-          </a:prstGeom>
-          <a:noFill/>
-          <a:ln>
-            <a:noFill/>
-          </a:ln>
-        </p:spPr>
-        <p:txBody>
-          <a:bodyPr spcFirstLastPara="1" wrap="square" lIns="0" tIns="0" rIns="0" bIns="0" anchor="t" anchorCtr="0">
-            <a:spAutoFit/>
-          </a:bodyPr>
-          <a:lstStyle/>
-          <a:p>
-            <a:pPr marL="0" marR="0" lvl="0" indent="0" algn="l" rtl="0">
-              <a:spcBef>
-                <a:spcPts val="0"/>
-              </a:spcBef>
-              <a:spcAft>
-                <a:spcPts val="0"/>
-              </a:spcAft>
-              <a:buNone/>
-            </a:pPr>
-            <a:r>
-              <a:rPr lang="en-US" sz="1600" b="0" i="0" u="none" strike="noStrike" cap="none">
-                <a:solidFill>
-                  <a:srgbClr val="F59E0B"/>
-                </a:solidFill>
-                <a:latin typeface="Times New Roman" panose="02020603050405020304" charset="0"/>
-                <a:ea typeface="Poppins SemiBold" panose="00000500000000000000"/>
-                <a:cs typeface="Times New Roman" panose="02020603050405020304" charset="0"/>
-                <a:sym typeface="Poppins SemiBold" panose="00000500000000000000"/>
-              </a:rPr>
-              <a:t>ÉTABLISSEMENT</a:t>
-            </a:r>
-            <a:endParaRPr lang="en-US" sz="1600" b="0" i="0" u="none" strike="noStrike" cap="none">
-              <a:solidFill>
-                <a:srgbClr val="F59E0B"/>
-              </a:solidFill>
-              <a:latin typeface="Times New Roman" panose="02020603050405020304" charset="0"/>
-              <a:ea typeface="Poppins SemiBold" panose="00000500000000000000"/>
-              <a:cs typeface="Times New Roman" panose="02020603050405020304" charset="0"/>
-              <a:sym typeface="Poppins SemiBold" panose="00000500000000000000"/>
-            </a:endParaRPr>
-          </a:p>
-        </p:txBody>
-      </p:sp>
-      <p:sp>
-        <p:nvSpPr>
-          <p:cNvPr id="97" name="Google Shape;97;p13"/>
-          <p:cNvSpPr txBox="1"/>
-          <p:nvPr/>
-        </p:nvSpPr>
-        <p:spPr>
-          <a:xfrm>
-            <a:off x="8324850" y="5657850"/>
-            <a:ext cx="2819400" cy="492125"/>
-          </a:xfrm>
-          <a:prstGeom prst="rect">
-            <a:avLst/>
-          </a:prstGeom>
-          <a:noFill/>
-          <a:ln>
-            <a:noFill/>
-          </a:ln>
-        </p:spPr>
-        <p:txBody>
-          <a:bodyPr spcFirstLastPara="1" wrap="square" lIns="0" tIns="0" rIns="0" bIns="0" anchor="t" anchorCtr="0">
-            <a:spAutoFit/>
-          </a:bodyPr>
-          <a:lstStyle/>
-          <a:p>
-            <a:pPr marL="0" marR="0" lvl="0" indent="0" algn="l" rtl="0">
-              <a:spcBef>
-                <a:spcPts val="0"/>
-              </a:spcBef>
-              <a:spcAft>
-                <a:spcPts val="0"/>
-              </a:spcAft>
-              <a:buNone/>
-            </a:pPr>
-            <a:r>
-              <a:rPr lang="en-US" sz="1600" b="0" i="0" u="none" strike="noStrike" cap="none">
-                <a:solidFill>
-                  <a:srgbClr val="F8FAFC"/>
-                </a:solidFill>
-                <a:latin typeface="Times New Roman" panose="02020603050405020304" charset="0"/>
-                <a:ea typeface="Lato" panose="020F0502020204030203"/>
-                <a:cs typeface="Times New Roman" panose="02020603050405020304" charset="0"/>
-                <a:sym typeface="Lato" panose="020F0502020204030203"/>
-              </a:rPr>
-              <a:t>IPNET Institute of Technology</a:t>
-            </a:r>
-            <a:br>
-              <a:rPr lang="en-US" sz="2800" b="0" i="0" u="none" strike="noStrike" cap="none">
-                <a:solidFill>
-                  <a:schemeClr val="dk1"/>
-                </a:solidFill>
-                <a:latin typeface="Times New Roman" panose="02020603050405020304" charset="0"/>
-                <a:ea typeface="Calibri" panose="020F0502020204030204"/>
-                <a:cs typeface="Times New Roman" panose="02020603050405020304" charset="0"/>
-                <a:sym typeface="Calibri" panose="020F0502020204030204"/>
-              </a:rPr>
-            </a:br>
-            <a:r>
-              <a:rPr lang="en-US" sz="1600" b="0" i="0" u="none" strike="noStrike" cap="none">
-                <a:solidFill>
-                  <a:srgbClr val="F8FAFC"/>
-                </a:solidFill>
-                <a:latin typeface="Times New Roman" panose="02020603050405020304" charset="0"/>
-                <a:ea typeface="Lato" panose="020F0502020204030203"/>
-                <a:cs typeface="Times New Roman" panose="02020603050405020304" charset="0"/>
-                <a:sym typeface="Lato" panose="020F0502020204030203"/>
-              </a:rPr>
-              <a:t>Promotion Génie Logiciel 202</a:t>
-            </a:r>
-            <a:r>
-              <a:rPr lang="fr-FR" altLang="en-US" sz="1600" b="0" i="0" u="none" strike="noStrike" cap="none">
-                <a:solidFill>
-                  <a:srgbClr val="F8FAFC"/>
-                </a:solidFill>
-                <a:latin typeface="Times New Roman" panose="02020603050405020304" charset="0"/>
-                <a:ea typeface="Lato" panose="020F0502020204030203"/>
-                <a:cs typeface="Times New Roman" panose="02020603050405020304" charset="0"/>
-                <a:sym typeface="Lato" panose="020F0502020204030203"/>
-              </a:rPr>
-              <a:t>3</a:t>
-            </a:r>
-            <a:endParaRPr lang="fr-FR" altLang="en-US" sz="1600" b="0" i="0" u="none" strike="noStrike" cap="none">
               <a:solidFill>
                 <a:srgbClr val="F8FAFC"/>
               </a:solidFill>
@@ -21487,342 +21309,6 @@
       </p:sp>
       <p:sp>
         <p:nvSpPr>
-          <p:cNvPr id="180" name="Google Shape;180;p17"/>
-          <p:cNvSpPr/>
-          <p:nvPr/>
-        </p:nvSpPr>
-        <p:spPr>
-          <a:xfrm>
-            <a:off x="581025" y="3487042"/>
-            <a:ext cx="2086867" cy="9525"/>
-          </a:xfrm>
-          <a:prstGeom prst="rect">
-            <a:avLst/>
-          </a:prstGeom>
-          <a:solidFill>
-            <a:srgbClr val="E2E8F0"/>
-          </a:solidFill>
-          <a:ln>
-            <a:noFill/>
-          </a:ln>
-        </p:spPr>
-        <p:txBody>
-          <a:bodyPr spcFirstLastPara="1" wrap="square" lIns="91425" tIns="45700" rIns="91425" bIns="45700" anchor="ctr" anchorCtr="0">
-            <a:noAutofit/>
-          </a:bodyPr>
-          <a:lstStyle/>
-          <a:p>
-            <a:pPr marL="0" marR="0" lvl="0" indent="0" algn="ctr" rtl="0">
-              <a:spcBef>
-                <a:spcPts val="0"/>
-              </a:spcBef>
-              <a:spcAft>
-                <a:spcPts val="0"/>
-              </a:spcAft>
-              <a:buNone/>
-            </a:pPr>
-            <a:endParaRPr sz="1800" b="0" i="0" u="none" strike="noStrike" cap="none">
-              <a:solidFill>
-                <a:schemeClr val="dk1"/>
-              </a:solidFill>
-              <a:latin typeface="Calibri" panose="020F0502020204030204"/>
-              <a:ea typeface="Calibri" panose="020F0502020204030204"/>
-              <a:cs typeface="Calibri" panose="020F0502020204030204"/>
-              <a:sym typeface="Calibri" panose="020F0502020204030204"/>
-            </a:endParaRPr>
-          </a:p>
-        </p:txBody>
-      </p:sp>
-      <p:sp>
-        <p:nvSpPr>
-          <p:cNvPr id="182" name="Google Shape;182;p17"/>
-          <p:cNvSpPr/>
-          <p:nvPr/>
-        </p:nvSpPr>
-        <p:spPr>
-          <a:xfrm>
-            <a:off x="6184850" y="3487042"/>
-            <a:ext cx="3557438" cy="9525"/>
-          </a:xfrm>
-          <a:prstGeom prst="rect">
-            <a:avLst/>
-          </a:prstGeom>
-          <a:solidFill>
-            <a:srgbClr val="E2E8F0"/>
-          </a:solidFill>
-          <a:ln>
-            <a:noFill/>
-          </a:ln>
-        </p:spPr>
-        <p:txBody>
-          <a:bodyPr spcFirstLastPara="1" wrap="square" lIns="91425" tIns="45700" rIns="91425" bIns="45700" anchor="ctr" anchorCtr="0">
-            <a:noAutofit/>
-          </a:bodyPr>
-          <a:lstStyle/>
-          <a:p>
-            <a:pPr marL="0" marR="0" lvl="0" indent="0" algn="ctr" rtl="0">
-              <a:spcBef>
-                <a:spcPts val="0"/>
-              </a:spcBef>
-              <a:spcAft>
-                <a:spcPts val="0"/>
-              </a:spcAft>
-              <a:buNone/>
-            </a:pPr>
-            <a:endParaRPr sz="1800" b="0" i="0" u="none" strike="noStrike" cap="none">
-              <a:solidFill>
-                <a:schemeClr val="dk1"/>
-              </a:solidFill>
-              <a:latin typeface="Calibri" panose="020F0502020204030204"/>
-              <a:ea typeface="Calibri" panose="020F0502020204030204"/>
-              <a:cs typeface="Calibri" panose="020F0502020204030204"/>
-              <a:sym typeface="Calibri" panose="020F0502020204030204"/>
-            </a:endParaRPr>
-          </a:p>
-        </p:txBody>
-      </p:sp>
-      <p:sp>
-        <p:nvSpPr>
-          <p:cNvPr id="183" name="Google Shape;183;p17"/>
-          <p:cNvSpPr/>
-          <p:nvPr/>
-        </p:nvSpPr>
-        <p:spPr>
-          <a:xfrm>
-            <a:off x="9742289" y="3487042"/>
-            <a:ext cx="1868685" cy="9525"/>
-          </a:xfrm>
-          <a:prstGeom prst="rect">
-            <a:avLst/>
-          </a:prstGeom>
-          <a:solidFill>
-            <a:srgbClr val="E2E8F0"/>
-          </a:solidFill>
-          <a:ln>
-            <a:noFill/>
-          </a:ln>
-        </p:spPr>
-        <p:txBody>
-          <a:bodyPr spcFirstLastPara="1" wrap="square" lIns="91425" tIns="45700" rIns="91425" bIns="45700" anchor="ctr" anchorCtr="0">
-            <a:noAutofit/>
-          </a:bodyPr>
-          <a:lstStyle/>
-          <a:p>
-            <a:pPr marL="0" marR="0" lvl="0" indent="0" algn="ctr" rtl="0">
-              <a:spcBef>
-                <a:spcPts val="0"/>
-              </a:spcBef>
-              <a:spcAft>
-                <a:spcPts val="0"/>
-              </a:spcAft>
-              <a:buNone/>
-            </a:pPr>
-            <a:endParaRPr sz="1800" b="0" i="0" u="none" strike="noStrike" cap="none">
-              <a:solidFill>
-                <a:schemeClr val="dk1"/>
-              </a:solidFill>
-              <a:latin typeface="Calibri" panose="020F0502020204030204"/>
-              <a:ea typeface="Calibri" panose="020F0502020204030204"/>
-              <a:cs typeface="Calibri" panose="020F0502020204030204"/>
-              <a:sym typeface="Calibri" panose="020F0502020204030204"/>
-            </a:endParaRPr>
-          </a:p>
-        </p:txBody>
-      </p:sp>
-      <p:sp>
-        <p:nvSpPr>
-          <p:cNvPr id="184" name="Google Shape;184;p17"/>
-          <p:cNvSpPr/>
-          <p:nvPr/>
-        </p:nvSpPr>
-        <p:spPr>
-          <a:xfrm>
-            <a:off x="581025" y="4163317"/>
-            <a:ext cx="2086867" cy="9525"/>
-          </a:xfrm>
-          <a:prstGeom prst="rect">
-            <a:avLst/>
-          </a:prstGeom>
-          <a:solidFill>
-            <a:srgbClr val="E2E8F0"/>
-          </a:solidFill>
-          <a:ln>
-            <a:noFill/>
-          </a:ln>
-        </p:spPr>
-        <p:txBody>
-          <a:bodyPr spcFirstLastPara="1" wrap="square" lIns="91425" tIns="45700" rIns="91425" bIns="45700" anchor="ctr" anchorCtr="0">
-            <a:noAutofit/>
-          </a:bodyPr>
-          <a:lstStyle/>
-          <a:p>
-            <a:pPr marL="0" marR="0" lvl="0" indent="0" algn="ctr" rtl="0">
-              <a:spcBef>
-                <a:spcPts val="0"/>
-              </a:spcBef>
-              <a:spcAft>
-                <a:spcPts val="0"/>
-              </a:spcAft>
-              <a:buNone/>
-            </a:pPr>
-            <a:endParaRPr sz="1800" b="0" i="0" u="none" strike="noStrike" cap="none">
-              <a:solidFill>
-                <a:schemeClr val="dk1"/>
-              </a:solidFill>
-              <a:latin typeface="Calibri" panose="020F0502020204030204"/>
-              <a:ea typeface="Calibri" panose="020F0502020204030204"/>
-              <a:cs typeface="Calibri" panose="020F0502020204030204"/>
-              <a:sym typeface="Calibri" panose="020F0502020204030204"/>
-            </a:endParaRPr>
-          </a:p>
-        </p:txBody>
-      </p:sp>
-      <p:sp>
-        <p:nvSpPr>
-          <p:cNvPr id="187" name="Google Shape;187;p17"/>
-          <p:cNvSpPr/>
-          <p:nvPr/>
-        </p:nvSpPr>
-        <p:spPr>
-          <a:xfrm>
-            <a:off x="9742289" y="4163317"/>
-            <a:ext cx="1868685" cy="9525"/>
-          </a:xfrm>
-          <a:prstGeom prst="rect">
-            <a:avLst/>
-          </a:prstGeom>
-          <a:solidFill>
-            <a:srgbClr val="E2E8F0"/>
-          </a:solidFill>
-          <a:ln>
-            <a:noFill/>
-          </a:ln>
-        </p:spPr>
-        <p:txBody>
-          <a:bodyPr spcFirstLastPara="1" wrap="square" lIns="91425" tIns="45700" rIns="91425" bIns="45700" anchor="ctr" anchorCtr="0">
-            <a:noAutofit/>
-          </a:bodyPr>
-          <a:lstStyle/>
-          <a:p>
-            <a:pPr marL="0" marR="0" lvl="0" indent="0" algn="ctr" rtl="0">
-              <a:spcBef>
-                <a:spcPts val="0"/>
-              </a:spcBef>
-              <a:spcAft>
-                <a:spcPts val="0"/>
-              </a:spcAft>
-              <a:buNone/>
-            </a:pPr>
-            <a:endParaRPr sz="1800" b="0" i="0" u="none" strike="noStrike" cap="none">
-              <a:solidFill>
-                <a:schemeClr val="dk1"/>
-              </a:solidFill>
-              <a:latin typeface="Calibri" panose="020F0502020204030204"/>
-              <a:ea typeface="Calibri" panose="020F0502020204030204"/>
-              <a:cs typeface="Calibri" panose="020F0502020204030204"/>
-              <a:sym typeface="Calibri" panose="020F0502020204030204"/>
-            </a:endParaRPr>
-          </a:p>
-        </p:txBody>
-      </p:sp>
-      <p:sp>
-        <p:nvSpPr>
-          <p:cNvPr id="188" name="Google Shape;188;p17"/>
-          <p:cNvSpPr/>
-          <p:nvPr/>
-        </p:nvSpPr>
-        <p:spPr>
-          <a:xfrm>
-            <a:off x="581025" y="4839592"/>
-            <a:ext cx="2086867" cy="9525"/>
-          </a:xfrm>
-          <a:prstGeom prst="rect">
-            <a:avLst/>
-          </a:prstGeom>
-          <a:solidFill>
-            <a:srgbClr val="E2E8F0"/>
-          </a:solidFill>
-          <a:ln>
-            <a:noFill/>
-          </a:ln>
-        </p:spPr>
-        <p:txBody>
-          <a:bodyPr spcFirstLastPara="1" wrap="square" lIns="91425" tIns="45700" rIns="91425" bIns="45700" anchor="ctr" anchorCtr="0">
-            <a:noAutofit/>
-          </a:bodyPr>
-          <a:lstStyle/>
-          <a:p>
-            <a:pPr marL="0" marR="0" lvl="0" indent="0" algn="ctr" rtl="0">
-              <a:spcBef>
-                <a:spcPts val="0"/>
-              </a:spcBef>
-              <a:spcAft>
-                <a:spcPts val="0"/>
-              </a:spcAft>
-              <a:buNone/>
-            </a:pPr>
-            <a:endParaRPr sz="1800" b="0" i="0" u="none" strike="noStrike" cap="none">
-              <a:solidFill>
-                <a:schemeClr val="dk1"/>
-              </a:solidFill>
-              <a:latin typeface="Calibri" panose="020F0502020204030204"/>
-              <a:ea typeface="Calibri" panose="020F0502020204030204"/>
-              <a:cs typeface="Calibri" panose="020F0502020204030204"/>
-              <a:sym typeface="Calibri" panose="020F0502020204030204"/>
-            </a:endParaRPr>
-          </a:p>
-        </p:txBody>
-      </p:sp>
-      <p:sp>
-        <p:nvSpPr>
-          <p:cNvPr id="191" name="Google Shape;191;p17"/>
-          <p:cNvSpPr/>
-          <p:nvPr/>
-        </p:nvSpPr>
-        <p:spPr>
-          <a:xfrm>
-            <a:off x="9742289" y="4839592"/>
-            <a:ext cx="1868685" cy="9525"/>
-          </a:xfrm>
-          <a:prstGeom prst="rect">
-            <a:avLst/>
-          </a:prstGeom>
-          <a:solidFill>
-            <a:srgbClr val="E2E8F0"/>
-          </a:solidFill>
-          <a:ln>
-            <a:noFill/>
-          </a:ln>
-        </p:spPr>
-        <p:txBody>
-          <a:bodyPr spcFirstLastPara="1" wrap="square" lIns="91425" tIns="45700" rIns="91425" bIns="45700" anchor="ctr" anchorCtr="0">
-            <a:noAutofit/>
-          </a:bodyPr>
-          <a:lstStyle/>
-          <a:p>
-            <a:pPr marL="0" marR="0" lvl="0" indent="0" algn="ctr" rtl="0">
-              <a:spcBef>
-                <a:spcPts val="0"/>
-              </a:spcBef>
-              <a:spcAft>
-                <a:spcPts val="0"/>
-              </a:spcAft>
-              <a:buNone/>
-            </a:pPr>
-            <a:endParaRPr sz="1800" b="0" i="0" u="none" strike="noStrike" cap="none">
-              <a:solidFill>
-                <a:schemeClr val="dk1"/>
-              </a:solidFill>
-              <a:latin typeface="Calibri" panose="020F0502020204030204"/>
-              <a:ea typeface="Calibri" panose="020F0502020204030204"/>
-              <a:cs typeface="Calibri" panose="020F0502020204030204"/>
-              <a:sym typeface="Calibri" panose="020F0502020204030204"/>
-            </a:endParaRPr>
-          </a:p>
-        </p:txBody>
-      </p:sp>
-      <p:sp>
-        <p:nvSpPr>
           <p:cNvPr id="200" name="Google Shape;200;p17"/>
           <p:cNvSpPr txBox="1"/>
           <p:nvPr/>
@@ -22896,7 +22382,18 @@
                 <a:latin typeface="Poppins" panose="00000500000000000000" charset="0"/>
                 <a:cs typeface="Poppins" panose="00000500000000000000" charset="0"/>
               </a:rPr>
-              <a:t>Conclusion &amp; perspectives</a:t>
+              <a:t>Conclusion &amp; perspecti</a:t>
+            </a:r>
+            <a:r>
+              <a:rPr lang="fr-FR" altLang="en-US" sz="4800" b="1" cap="all">
+                <a:solidFill>
+                  <a:schemeClr val="tx1"/>
+                </a:solidFill>
+                <a:uFillTx/>
+                <a:latin typeface="Poppins" panose="00000500000000000000" charset="0"/>
+                <a:cs typeface="Poppins" panose="00000500000000000000" charset="0"/>
+              </a:rPr>
+              <a:t>ves</a:t>
             </a:r>
             <a:endParaRPr lang="fr-FR" altLang="en-US" sz="4800" b="1" cap="all">
               <a:solidFill>
@@ -24450,7 +23947,43 @@
                 <a:cs typeface="Times New Roman" panose="02020603050405020304" charset="0"/>
                 <a:sym typeface="Lato" panose="020F0502020204030203"/>
               </a:rPr>
-              <a:t>La capitale du Togo connaît un essor démographique et urbain sans précédent. Cette forte dynamique s’accompagne d’une multiplication rapide des biens immobiliers, notamment sous deux formes majeures : la location à long terme (immeubles, cours communes) et les séjours courts meublés de type Airbnb pour la diaspora.</a:t>
+              <a:t>La capitale du Togo connaît un essor démographique et urbain sans précédent. Cette forte dynamique s’accompagne d’une multiplication rapide des biens immobiliers, notamment sous deux formes majeures : la location à long terme (immeubles, cours communes) et l</a:t>
+            </a:r>
+            <a:r>
+              <a:rPr lang="fr-FR" altLang="en-US" sz="1700" b="0" i="0" u="none" strike="noStrike" cap="none">
+                <a:solidFill>
+                  <a:srgbClr val="475569"/>
+                </a:solidFill>
+                <a:latin typeface="Times New Roman" panose="02020603050405020304" charset="0"/>
+                <a:ea typeface="Lato" panose="020F0502020204030203"/>
+                <a:cs typeface="Times New Roman" panose="02020603050405020304" charset="0"/>
+                <a:sym typeface="Lato" panose="020F0502020204030203"/>
+              </a:rPr>
+              <a:t>a location de </a:t>
+            </a:r>
+            <a:r>
+              <a:rPr lang="en-US" sz="1700">
+                <a:solidFill>
+                  <a:srgbClr val="475569"/>
+                </a:solidFill>
+                <a:latin typeface="Times New Roman" panose="02020603050405020304" charset="0"/>
+                <a:ea typeface="Lato" panose="020F0502020204030203"/>
+                <a:cs typeface="Times New Roman" panose="02020603050405020304" charset="0"/>
+                <a:sym typeface="Lato" panose="020F0502020204030203"/>
+              </a:rPr>
+              <a:t>courts </a:t>
+            </a:r>
+            <a:r>
+              <a:rPr lang="en-US" sz="1700" b="0" i="0" u="none" strike="noStrike" cap="none">
+                <a:solidFill>
+                  <a:srgbClr val="475569"/>
+                </a:solidFill>
+                <a:latin typeface="Times New Roman" panose="02020603050405020304" charset="0"/>
+                <a:ea typeface="Lato" panose="020F0502020204030203"/>
+                <a:cs typeface="Times New Roman" panose="02020603050405020304" charset="0"/>
+                <a:sym typeface="Lato" panose="020F0502020204030203"/>
+              </a:rPr>
+              <a:t> séjours meublés de type Airbnb pour la diaspora.</a:t>
             </a:r>
             <a:endParaRPr lang="en-US" sz="1700" b="0" i="0" u="none" strike="noStrike" cap="none">
               <a:solidFill>
@@ -24646,7 +24179,7 @@
         <p:spPr>
           <a:xfrm>
             <a:off x="571500" y="1019175"/>
-            <a:ext cx="11601450" cy="411360"/>
+            <a:ext cx="11601450" cy="497840"/>
           </a:xfrm>
           <a:prstGeom prst="rect">
             <a:avLst/>
@@ -24684,7 +24217,7 @@
                 <a:cs typeface="Poppins" panose="00000500000000000000"/>
                 <a:sym typeface="Poppins" panose="00000500000000000000"/>
               </a:rPr>
-              <a:t>Introduction &amp; Contexte Terrain</a:t>
+              <a:t>Introduction &amp; Contexte </a:t>
             </a:r>
             <a:endParaRPr lang="en-US" sz="2700" b="1" i="0" u="none" strike="noStrike" cap="none">
               <a:solidFill>
@@ -25426,7 +24959,55 @@
                 <a:cs typeface="Lato" panose="020F0502020204030203"/>
                 <a:sym typeface="Lato" panose="020F0502020204030203"/>
               </a:rPr>
-              <a:t> Frustrations réciproques dues à l'inexistence d'une passerelle transparente et sécurisée de paiement Mobile Money.</a:t>
+              <a:t> Frustrations réciproques dues à l'inexistence d'une passerelle transparente et sécurisée de paiement </a:t>
+            </a:r>
+            <a:r>
+              <a:rPr lang="fr-FR" altLang="en-US" b="0" i="0" u="none" strike="noStrike" cap="none">
+                <a:solidFill>
+                  <a:srgbClr val="475569"/>
+                </a:solidFill>
+                <a:latin typeface="Lato" panose="020F0502020204030203"/>
+                <a:ea typeface="Lato" panose="020F0502020204030203"/>
+                <a:cs typeface="Lato" panose="020F0502020204030203"/>
+                <a:sym typeface="Lato" panose="020F0502020204030203"/>
+              </a:rPr>
+              <a:t>(exemple des </a:t>
+            </a:r>
+            <a:r>
+              <a:rPr lang="en-US" b="0" i="0" u="none" strike="noStrike" cap="none">
+                <a:solidFill>
+                  <a:srgbClr val="475569"/>
+                </a:solidFill>
+                <a:latin typeface="Lato" panose="020F0502020204030203"/>
+                <a:ea typeface="Lato" panose="020F0502020204030203"/>
+                <a:cs typeface="Lato" panose="020F0502020204030203"/>
+                <a:sym typeface="Lato" panose="020F0502020204030203"/>
+              </a:rPr>
+              <a:t>Mobile Money</a:t>
+            </a:r>
+            <a:r>
+              <a:rPr lang="fr-FR" altLang="en-US" b="0" i="0" u="none" strike="noStrike" cap="none">
+                <a:solidFill>
+                  <a:srgbClr val="475569"/>
+                </a:solidFill>
+                <a:latin typeface="Lato" panose="020F0502020204030203"/>
+                <a:ea typeface="Lato" panose="020F0502020204030203"/>
+                <a:cs typeface="Lato" panose="020F0502020204030203"/>
+                <a:sym typeface="Lato" panose="020F0502020204030203"/>
+              </a:rPr>
+              <a:t>)</a:t>
+            </a:r>
+            <a:r>
+              <a:rPr lang="en-US" b="0" i="0" u="none" strike="noStrike" cap="none">
+                <a:solidFill>
+                  <a:srgbClr val="475569"/>
+                </a:solidFill>
+                <a:latin typeface="Lato" panose="020F0502020204030203"/>
+                <a:ea typeface="Lato" panose="020F0502020204030203"/>
+                <a:cs typeface="Lato" panose="020F0502020204030203"/>
+                <a:sym typeface="Lato" panose="020F0502020204030203"/>
+              </a:rPr>
+              <a:t>.</a:t>
             </a:r>
             <a:endParaRPr lang="en-US" b="0" i="0" u="none" strike="noStrike" cap="none">
               <a:solidFill>
@@ -27561,582 +27142,6 @@
       </p:sp>
       <p:sp>
         <p:nvSpPr>
-          <p:cNvPr id="180" name="Google Shape;180;p17"/>
-          <p:cNvSpPr/>
-          <p:nvPr/>
-        </p:nvSpPr>
-        <p:spPr>
-          <a:xfrm>
-            <a:off x="581025" y="3487042"/>
-            <a:ext cx="2086867" cy="9525"/>
-          </a:xfrm>
-          <a:prstGeom prst="rect">
-            <a:avLst/>
-          </a:prstGeom>
-          <a:solidFill>
-            <a:srgbClr val="E2E8F0"/>
-          </a:solidFill>
-          <a:ln>
-            <a:noFill/>
-          </a:ln>
-        </p:spPr>
-        <p:txBody>
-          <a:bodyPr spcFirstLastPara="1" wrap="square" lIns="91425" tIns="45700" rIns="91425" bIns="45700" anchor="ctr" anchorCtr="0">
-            <a:noAutofit/>
-          </a:bodyPr>
-          <a:lstStyle/>
-          <a:p>
-            <a:pPr marL="0" marR="0" lvl="0" indent="0" algn="ctr" rtl="0">
-              <a:spcBef>
-                <a:spcPts val="0"/>
-              </a:spcBef>
-              <a:spcAft>
-                <a:spcPts val="0"/>
-              </a:spcAft>
-              <a:buNone/>
-            </a:pPr>
-            <a:endParaRPr sz="1800" b="0" i="0" u="none" strike="noStrike" cap="none">
-              <a:solidFill>
-                <a:schemeClr val="dk1"/>
-              </a:solidFill>
-              <a:latin typeface="Calibri" panose="020F0502020204030204"/>
-              <a:ea typeface="Calibri" panose="020F0502020204030204"/>
-              <a:cs typeface="Calibri" panose="020F0502020204030204"/>
-              <a:sym typeface="Calibri" panose="020F0502020204030204"/>
-            </a:endParaRPr>
-          </a:p>
-        </p:txBody>
-      </p:sp>
-      <p:sp>
-        <p:nvSpPr>
-          <p:cNvPr id="181" name="Google Shape;181;p17"/>
-          <p:cNvSpPr/>
-          <p:nvPr/>
-        </p:nvSpPr>
-        <p:spPr>
-          <a:xfrm>
-            <a:off x="2667892" y="3487042"/>
-            <a:ext cx="3516957" cy="9525"/>
-          </a:xfrm>
-          <a:prstGeom prst="rect">
-            <a:avLst/>
-          </a:prstGeom>
-          <a:solidFill>
-            <a:srgbClr val="E2E8F0"/>
-          </a:solidFill>
-          <a:ln>
-            <a:noFill/>
-          </a:ln>
-        </p:spPr>
-        <p:txBody>
-          <a:bodyPr spcFirstLastPara="1" wrap="square" lIns="91425" tIns="45700" rIns="91425" bIns="45700" anchor="ctr" anchorCtr="0">
-            <a:noAutofit/>
-          </a:bodyPr>
-          <a:lstStyle/>
-          <a:p>
-            <a:pPr marL="0" marR="0" lvl="0" indent="0" algn="ctr" rtl="0">
-              <a:spcBef>
-                <a:spcPts val="0"/>
-              </a:spcBef>
-              <a:spcAft>
-                <a:spcPts val="0"/>
-              </a:spcAft>
-              <a:buNone/>
-            </a:pPr>
-            <a:endParaRPr sz="1800" b="0" i="0" u="none" strike="noStrike" cap="none">
-              <a:solidFill>
-                <a:schemeClr val="dk1"/>
-              </a:solidFill>
-              <a:latin typeface="Calibri" panose="020F0502020204030204"/>
-              <a:ea typeface="Calibri" panose="020F0502020204030204"/>
-              <a:cs typeface="Calibri" panose="020F0502020204030204"/>
-              <a:sym typeface="Calibri" panose="020F0502020204030204"/>
-            </a:endParaRPr>
-          </a:p>
-        </p:txBody>
-      </p:sp>
-      <p:sp>
-        <p:nvSpPr>
-          <p:cNvPr id="182" name="Google Shape;182;p17"/>
-          <p:cNvSpPr/>
-          <p:nvPr/>
-        </p:nvSpPr>
-        <p:spPr>
-          <a:xfrm>
-            <a:off x="6184850" y="3487042"/>
-            <a:ext cx="3557438" cy="9525"/>
-          </a:xfrm>
-          <a:prstGeom prst="rect">
-            <a:avLst/>
-          </a:prstGeom>
-          <a:solidFill>
-            <a:srgbClr val="E2E8F0"/>
-          </a:solidFill>
-          <a:ln>
-            <a:noFill/>
-          </a:ln>
-        </p:spPr>
-        <p:txBody>
-          <a:bodyPr spcFirstLastPara="1" wrap="square" lIns="91425" tIns="45700" rIns="91425" bIns="45700" anchor="ctr" anchorCtr="0">
-            <a:noAutofit/>
-          </a:bodyPr>
-          <a:lstStyle/>
-          <a:p>
-            <a:pPr marL="0" marR="0" lvl="0" indent="0" algn="ctr" rtl="0">
-              <a:spcBef>
-                <a:spcPts val="0"/>
-              </a:spcBef>
-              <a:spcAft>
-                <a:spcPts val="0"/>
-              </a:spcAft>
-              <a:buNone/>
-            </a:pPr>
-            <a:endParaRPr sz="1800" b="0" i="0" u="none" strike="noStrike" cap="none">
-              <a:solidFill>
-                <a:schemeClr val="dk1"/>
-              </a:solidFill>
-              <a:latin typeface="Calibri" panose="020F0502020204030204"/>
-              <a:ea typeface="Calibri" panose="020F0502020204030204"/>
-              <a:cs typeface="Calibri" panose="020F0502020204030204"/>
-              <a:sym typeface="Calibri" panose="020F0502020204030204"/>
-            </a:endParaRPr>
-          </a:p>
-        </p:txBody>
-      </p:sp>
-      <p:sp>
-        <p:nvSpPr>
-          <p:cNvPr id="183" name="Google Shape;183;p17"/>
-          <p:cNvSpPr/>
-          <p:nvPr/>
-        </p:nvSpPr>
-        <p:spPr>
-          <a:xfrm>
-            <a:off x="9742289" y="3487042"/>
-            <a:ext cx="1868685" cy="9525"/>
-          </a:xfrm>
-          <a:prstGeom prst="rect">
-            <a:avLst/>
-          </a:prstGeom>
-          <a:solidFill>
-            <a:srgbClr val="E2E8F0"/>
-          </a:solidFill>
-          <a:ln>
-            <a:noFill/>
-          </a:ln>
-        </p:spPr>
-        <p:txBody>
-          <a:bodyPr spcFirstLastPara="1" wrap="square" lIns="91425" tIns="45700" rIns="91425" bIns="45700" anchor="ctr" anchorCtr="0">
-            <a:noAutofit/>
-          </a:bodyPr>
-          <a:lstStyle/>
-          <a:p>
-            <a:pPr marL="0" marR="0" lvl="0" indent="0" algn="ctr" rtl="0">
-              <a:spcBef>
-                <a:spcPts val="0"/>
-              </a:spcBef>
-              <a:spcAft>
-                <a:spcPts val="0"/>
-              </a:spcAft>
-              <a:buNone/>
-            </a:pPr>
-            <a:endParaRPr sz="1800" b="0" i="0" u="none" strike="noStrike" cap="none">
-              <a:solidFill>
-                <a:schemeClr val="dk1"/>
-              </a:solidFill>
-              <a:latin typeface="Calibri" panose="020F0502020204030204"/>
-              <a:ea typeface="Calibri" panose="020F0502020204030204"/>
-              <a:cs typeface="Calibri" panose="020F0502020204030204"/>
-              <a:sym typeface="Calibri" panose="020F0502020204030204"/>
-            </a:endParaRPr>
-          </a:p>
-        </p:txBody>
-      </p:sp>
-      <p:sp>
-        <p:nvSpPr>
-          <p:cNvPr id="184" name="Google Shape;184;p17"/>
-          <p:cNvSpPr/>
-          <p:nvPr/>
-        </p:nvSpPr>
-        <p:spPr>
-          <a:xfrm>
-            <a:off x="581025" y="4163317"/>
-            <a:ext cx="2086867" cy="9525"/>
-          </a:xfrm>
-          <a:prstGeom prst="rect">
-            <a:avLst/>
-          </a:prstGeom>
-          <a:solidFill>
-            <a:srgbClr val="E2E8F0"/>
-          </a:solidFill>
-          <a:ln>
-            <a:noFill/>
-          </a:ln>
-        </p:spPr>
-        <p:txBody>
-          <a:bodyPr spcFirstLastPara="1" wrap="square" lIns="91425" tIns="45700" rIns="91425" bIns="45700" anchor="ctr" anchorCtr="0">
-            <a:noAutofit/>
-          </a:bodyPr>
-          <a:lstStyle/>
-          <a:p>
-            <a:pPr marL="0" marR="0" lvl="0" indent="0" algn="ctr" rtl="0">
-              <a:spcBef>
-                <a:spcPts val="0"/>
-              </a:spcBef>
-              <a:spcAft>
-                <a:spcPts val="0"/>
-              </a:spcAft>
-              <a:buNone/>
-            </a:pPr>
-            <a:endParaRPr sz="1800" b="0" i="0" u="none" strike="noStrike" cap="none">
-              <a:solidFill>
-                <a:schemeClr val="dk1"/>
-              </a:solidFill>
-              <a:latin typeface="Calibri" panose="020F0502020204030204"/>
-              <a:ea typeface="Calibri" panose="020F0502020204030204"/>
-              <a:cs typeface="Calibri" panose="020F0502020204030204"/>
-              <a:sym typeface="Calibri" panose="020F0502020204030204"/>
-            </a:endParaRPr>
-          </a:p>
-        </p:txBody>
-      </p:sp>
-      <p:sp>
-        <p:nvSpPr>
-          <p:cNvPr id="185" name="Google Shape;185;p17"/>
-          <p:cNvSpPr/>
-          <p:nvPr/>
-        </p:nvSpPr>
-        <p:spPr>
-          <a:xfrm>
-            <a:off x="2667892" y="4163317"/>
-            <a:ext cx="3516957" cy="9525"/>
-          </a:xfrm>
-          <a:prstGeom prst="rect">
-            <a:avLst/>
-          </a:prstGeom>
-          <a:solidFill>
-            <a:srgbClr val="E2E8F0"/>
-          </a:solidFill>
-          <a:ln>
-            <a:noFill/>
-          </a:ln>
-        </p:spPr>
-        <p:txBody>
-          <a:bodyPr spcFirstLastPara="1" wrap="square" lIns="91425" tIns="45700" rIns="91425" bIns="45700" anchor="ctr" anchorCtr="0">
-            <a:noAutofit/>
-          </a:bodyPr>
-          <a:lstStyle/>
-          <a:p>
-            <a:pPr marL="0" marR="0" lvl="0" indent="0" algn="ctr" rtl="0">
-              <a:spcBef>
-                <a:spcPts val="0"/>
-              </a:spcBef>
-              <a:spcAft>
-                <a:spcPts val="0"/>
-              </a:spcAft>
-              <a:buNone/>
-            </a:pPr>
-            <a:endParaRPr sz="1800" b="0" i="0" u="none" strike="noStrike" cap="none">
-              <a:solidFill>
-                <a:schemeClr val="dk1"/>
-              </a:solidFill>
-              <a:latin typeface="Calibri" panose="020F0502020204030204"/>
-              <a:ea typeface="Calibri" panose="020F0502020204030204"/>
-              <a:cs typeface="Calibri" panose="020F0502020204030204"/>
-              <a:sym typeface="Calibri" panose="020F0502020204030204"/>
-            </a:endParaRPr>
-          </a:p>
-        </p:txBody>
-      </p:sp>
-      <p:sp>
-        <p:nvSpPr>
-          <p:cNvPr id="186" name="Google Shape;186;p17"/>
-          <p:cNvSpPr/>
-          <p:nvPr/>
-        </p:nvSpPr>
-        <p:spPr>
-          <a:xfrm>
-            <a:off x="6184850" y="4163317"/>
-            <a:ext cx="3557438" cy="9525"/>
-          </a:xfrm>
-          <a:prstGeom prst="rect">
-            <a:avLst/>
-          </a:prstGeom>
-          <a:solidFill>
-            <a:srgbClr val="E2E8F0"/>
-          </a:solidFill>
-          <a:ln>
-            <a:noFill/>
-          </a:ln>
-        </p:spPr>
-        <p:txBody>
-          <a:bodyPr spcFirstLastPara="1" wrap="square" lIns="91425" tIns="45700" rIns="91425" bIns="45700" anchor="ctr" anchorCtr="0">
-            <a:noAutofit/>
-          </a:bodyPr>
-          <a:lstStyle/>
-          <a:p>
-            <a:pPr marL="0" marR="0" lvl="0" indent="0" algn="ctr" rtl="0">
-              <a:spcBef>
-                <a:spcPts val="0"/>
-              </a:spcBef>
-              <a:spcAft>
-                <a:spcPts val="0"/>
-              </a:spcAft>
-              <a:buNone/>
-            </a:pPr>
-            <a:endParaRPr sz="1800" b="0" i="0" u="none" strike="noStrike" cap="none">
-              <a:solidFill>
-                <a:schemeClr val="dk1"/>
-              </a:solidFill>
-              <a:latin typeface="Calibri" panose="020F0502020204030204"/>
-              <a:ea typeface="Calibri" panose="020F0502020204030204"/>
-              <a:cs typeface="Calibri" panose="020F0502020204030204"/>
-              <a:sym typeface="Calibri" panose="020F0502020204030204"/>
-            </a:endParaRPr>
-          </a:p>
-        </p:txBody>
-      </p:sp>
-      <p:sp>
-        <p:nvSpPr>
-          <p:cNvPr id="187" name="Google Shape;187;p17"/>
-          <p:cNvSpPr/>
-          <p:nvPr/>
-        </p:nvSpPr>
-        <p:spPr>
-          <a:xfrm>
-            <a:off x="9742289" y="4163317"/>
-            <a:ext cx="1868685" cy="9525"/>
-          </a:xfrm>
-          <a:prstGeom prst="rect">
-            <a:avLst/>
-          </a:prstGeom>
-          <a:solidFill>
-            <a:srgbClr val="E2E8F0"/>
-          </a:solidFill>
-          <a:ln>
-            <a:noFill/>
-          </a:ln>
-        </p:spPr>
-        <p:txBody>
-          <a:bodyPr spcFirstLastPara="1" wrap="square" lIns="91425" tIns="45700" rIns="91425" bIns="45700" anchor="ctr" anchorCtr="0">
-            <a:noAutofit/>
-          </a:bodyPr>
-          <a:lstStyle/>
-          <a:p>
-            <a:pPr marL="0" marR="0" lvl="0" indent="0" algn="ctr" rtl="0">
-              <a:spcBef>
-                <a:spcPts val="0"/>
-              </a:spcBef>
-              <a:spcAft>
-                <a:spcPts val="0"/>
-              </a:spcAft>
-              <a:buNone/>
-            </a:pPr>
-            <a:endParaRPr sz="1800" b="0" i="0" u="none" strike="noStrike" cap="none">
-              <a:solidFill>
-                <a:schemeClr val="dk1"/>
-              </a:solidFill>
-              <a:latin typeface="Calibri" panose="020F0502020204030204"/>
-              <a:ea typeface="Calibri" panose="020F0502020204030204"/>
-              <a:cs typeface="Calibri" panose="020F0502020204030204"/>
-              <a:sym typeface="Calibri" panose="020F0502020204030204"/>
-            </a:endParaRPr>
-          </a:p>
-        </p:txBody>
-      </p:sp>
-      <p:sp>
-        <p:nvSpPr>
-          <p:cNvPr id="188" name="Google Shape;188;p17"/>
-          <p:cNvSpPr/>
-          <p:nvPr/>
-        </p:nvSpPr>
-        <p:spPr>
-          <a:xfrm>
-            <a:off x="581025" y="4839592"/>
-            <a:ext cx="2086867" cy="9525"/>
-          </a:xfrm>
-          <a:prstGeom prst="rect">
-            <a:avLst/>
-          </a:prstGeom>
-          <a:solidFill>
-            <a:srgbClr val="E2E8F0"/>
-          </a:solidFill>
-          <a:ln>
-            <a:noFill/>
-          </a:ln>
-        </p:spPr>
-        <p:txBody>
-          <a:bodyPr spcFirstLastPara="1" wrap="square" lIns="91425" tIns="45700" rIns="91425" bIns="45700" anchor="ctr" anchorCtr="0">
-            <a:noAutofit/>
-          </a:bodyPr>
-          <a:lstStyle/>
-          <a:p>
-            <a:pPr marL="0" marR="0" lvl="0" indent="0" algn="ctr" rtl="0">
-              <a:spcBef>
-                <a:spcPts val="0"/>
-              </a:spcBef>
-              <a:spcAft>
-                <a:spcPts val="0"/>
-              </a:spcAft>
-              <a:buNone/>
-            </a:pPr>
-            <a:endParaRPr sz="1800" b="0" i="0" u="none" strike="noStrike" cap="none">
-              <a:solidFill>
-                <a:schemeClr val="dk1"/>
-              </a:solidFill>
-              <a:latin typeface="Calibri" panose="020F0502020204030204"/>
-              <a:ea typeface="Calibri" panose="020F0502020204030204"/>
-              <a:cs typeface="Calibri" panose="020F0502020204030204"/>
-              <a:sym typeface="Calibri" panose="020F0502020204030204"/>
-            </a:endParaRPr>
-          </a:p>
-        </p:txBody>
-      </p:sp>
-      <p:sp>
-        <p:nvSpPr>
-          <p:cNvPr id="189" name="Google Shape;189;p17"/>
-          <p:cNvSpPr/>
-          <p:nvPr/>
-        </p:nvSpPr>
-        <p:spPr>
-          <a:xfrm>
-            <a:off x="2667892" y="4839592"/>
-            <a:ext cx="3516957" cy="9525"/>
-          </a:xfrm>
-          <a:prstGeom prst="rect">
-            <a:avLst/>
-          </a:prstGeom>
-          <a:solidFill>
-            <a:srgbClr val="E2E8F0"/>
-          </a:solidFill>
-          <a:ln>
-            <a:noFill/>
-          </a:ln>
-        </p:spPr>
-        <p:txBody>
-          <a:bodyPr spcFirstLastPara="1" wrap="square" lIns="91425" tIns="45700" rIns="91425" bIns="45700" anchor="ctr" anchorCtr="0">
-            <a:noAutofit/>
-          </a:bodyPr>
-          <a:lstStyle/>
-          <a:p>
-            <a:pPr marL="0" marR="0" lvl="0" indent="0" algn="ctr" rtl="0">
-              <a:spcBef>
-                <a:spcPts val="0"/>
-              </a:spcBef>
-              <a:spcAft>
-                <a:spcPts val="0"/>
-              </a:spcAft>
-              <a:buNone/>
-            </a:pPr>
-            <a:endParaRPr sz="1800" b="0" i="0" u="none" strike="noStrike" cap="none">
-              <a:solidFill>
-                <a:schemeClr val="dk1"/>
-              </a:solidFill>
-              <a:latin typeface="Calibri" panose="020F0502020204030204"/>
-              <a:ea typeface="Calibri" panose="020F0502020204030204"/>
-              <a:cs typeface="Calibri" panose="020F0502020204030204"/>
-              <a:sym typeface="Calibri" panose="020F0502020204030204"/>
-            </a:endParaRPr>
-          </a:p>
-        </p:txBody>
-      </p:sp>
-      <p:sp>
-        <p:nvSpPr>
-          <p:cNvPr id="190" name="Google Shape;190;p17"/>
-          <p:cNvSpPr/>
-          <p:nvPr/>
-        </p:nvSpPr>
-        <p:spPr>
-          <a:xfrm>
-            <a:off x="6184850" y="4839592"/>
-            <a:ext cx="3557438" cy="9525"/>
-          </a:xfrm>
-          <a:prstGeom prst="rect">
-            <a:avLst/>
-          </a:prstGeom>
-          <a:solidFill>
-            <a:srgbClr val="E2E8F0"/>
-          </a:solidFill>
-          <a:ln>
-            <a:noFill/>
-          </a:ln>
-        </p:spPr>
-        <p:txBody>
-          <a:bodyPr spcFirstLastPara="1" wrap="square" lIns="91425" tIns="45700" rIns="91425" bIns="45700" anchor="ctr" anchorCtr="0">
-            <a:noAutofit/>
-          </a:bodyPr>
-          <a:lstStyle/>
-          <a:p>
-            <a:pPr marL="0" marR="0" lvl="0" indent="0" algn="ctr" rtl="0">
-              <a:spcBef>
-                <a:spcPts val="0"/>
-              </a:spcBef>
-              <a:spcAft>
-                <a:spcPts val="0"/>
-              </a:spcAft>
-              <a:buNone/>
-            </a:pPr>
-            <a:endParaRPr sz="1800" b="0" i="0" u="none" strike="noStrike" cap="none">
-              <a:solidFill>
-                <a:schemeClr val="dk1"/>
-              </a:solidFill>
-              <a:latin typeface="Calibri" panose="020F0502020204030204"/>
-              <a:ea typeface="Calibri" panose="020F0502020204030204"/>
-              <a:cs typeface="Calibri" panose="020F0502020204030204"/>
-              <a:sym typeface="Calibri" panose="020F0502020204030204"/>
-            </a:endParaRPr>
-          </a:p>
-        </p:txBody>
-      </p:sp>
-      <p:sp>
-        <p:nvSpPr>
-          <p:cNvPr id="191" name="Google Shape;191;p17"/>
-          <p:cNvSpPr/>
-          <p:nvPr/>
-        </p:nvSpPr>
-        <p:spPr>
-          <a:xfrm>
-            <a:off x="9742289" y="4839592"/>
-            <a:ext cx="1868685" cy="9525"/>
-          </a:xfrm>
-          <a:prstGeom prst="rect">
-            <a:avLst/>
-          </a:prstGeom>
-          <a:solidFill>
-            <a:srgbClr val="E2E8F0"/>
-          </a:solidFill>
-          <a:ln>
-            <a:noFill/>
-          </a:ln>
-        </p:spPr>
-        <p:txBody>
-          <a:bodyPr spcFirstLastPara="1" wrap="square" lIns="91425" tIns="45700" rIns="91425" bIns="45700" anchor="ctr" anchorCtr="0">
-            <a:noAutofit/>
-          </a:bodyPr>
-          <a:lstStyle/>
-          <a:p>
-            <a:pPr marL="0" marR="0" lvl="0" indent="0" algn="ctr" rtl="0">
-              <a:spcBef>
-                <a:spcPts val="0"/>
-              </a:spcBef>
-              <a:spcAft>
-                <a:spcPts val="0"/>
-              </a:spcAft>
-              <a:buNone/>
-            </a:pPr>
-            <a:endParaRPr sz="1800" b="0" i="0" u="none" strike="noStrike" cap="none">
-              <a:solidFill>
-                <a:schemeClr val="dk1"/>
-              </a:solidFill>
-              <a:latin typeface="Calibri" panose="020F0502020204030204"/>
-              <a:ea typeface="Calibri" panose="020F0502020204030204"/>
-              <a:cs typeface="Calibri" panose="020F0502020204030204"/>
-              <a:sym typeface="Calibri" panose="020F0502020204030204"/>
-            </a:endParaRPr>
-          </a:p>
-        </p:txBody>
-      </p:sp>
-      <p:sp>
-        <p:nvSpPr>
           <p:cNvPr id="200" name="Google Shape;200;p17"/>
           <p:cNvSpPr txBox="1"/>
           <p:nvPr/>
@@ -30920,7 +29925,7 @@
         <p:spPr>
           <a:xfrm>
             <a:off x="9631560" y="4544317"/>
-            <a:ext cx="1988790" cy="817245"/>
+            <a:ext cx="1988790" cy="653415"/>
           </a:xfrm>
           <a:prstGeom prst="rect">
             <a:avLst/>
@@ -30981,7 +29986,7 @@
                 <a:cs typeface="Lato" panose="020F0502020204030203"/>
                 <a:sym typeface="Lato" panose="020F0502020204030203"/>
               </a:rPr>
-              <a:t> Connexion FedaPay, validation de la Sandbox, rédaction de la thèse et guides.</a:t>
+              <a:t> Connexion, validation de la Sandbox, rédaction de la thèse et guides.</a:t>
             </a:r>
             <a:endParaRPr lang="en-US" b="0" i="0" u="none" strike="noStrike" cap="none">
               <a:solidFill>
